--- a/video/powerpoint/Som29.pptx
+++ b/video/powerpoint/Som29.pptx
@@ -8,6 +8,8 @@
     <p:sldId id="256" r:id="rId7"/>
     <p:sldId id="257" r:id="rId8"/>
     <p:sldId id="258" r:id="rId9"/>
+    <p:sldId id="259" r:id="rId10"/>
+    <p:sldId id="260" r:id="rId11"/>
   </p:sldIdLst>
   <p:sldSz cx="12191695" cy="6858000" type="screen4x3"/>
   <p:notesSz cx="6858000" cy="9144000"/>
@@ -3175,7 +3177,7 @@
         </p:nvSpPr>
         <p:spPr>
           <a:xfrm>
-            <a:off x="2743200" y="1828800"/>
+            <a:off x="2743200" y="1920240"/>
             <a:ext cx="5486400" cy="1005840"/>
           </a:xfrm>
           <a:prstGeom prst="rect">
@@ -3190,6 +3192,15 @@
           <a:lstStyle/>
           <a:p>
             <a:pPr algn="ctr"/>
+            <a:r>
+              <a:rPr sz="6000" b="1">
+                <a:solidFill>
+                  <a:srgbClr val="1A1A18"/>
+                </a:solidFill>
+                <a:latin typeface="DM Serif Display"/>
+              </a:rPr>
+              <a:t>H2 · </a:t>
+            </a:r>
             <a:r>
               <a:rPr sz="6000" b="1">
                 <a:solidFill>
@@ -3218,7 +3229,7 @@
         </p:blipFill>
         <p:spPr>
           <a:xfrm>
-            <a:off x="3017520" y="3200400"/>
+            <a:off x="3017520" y="3291840"/>
             <a:ext cx="4937760" cy="563421"/>
           </a:xfrm>
           <a:prstGeom prst="rect">
@@ -3447,13 +3458,57 @@
       </p:pic>
       <p:sp>
         <p:nvSpPr>
-          <p:cNvPr id="4" name="Rounded Rectangle 3"/>
+          <p:cNvPr id="4" name="TextBox 3"/>
+          <p:cNvSpPr txBox="1"/>
+          <p:nvPr/>
+        </p:nvSpPr>
+        <p:spPr>
+          <a:xfrm>
+            <a:off x="914400" y="411480"/>
+            <a:ext cx="9144000" cy="640080"/>
+          </a:xfrm>
+          <a:prstGeom prst="rect">
+            <a:avLst/>
+          </a:prstGeom>
+          <a:noFill/>
+        </p:spPr>
+        <p:txBody>
+          <a:bodyPr wrap="square" lIns="0" rIns="0" tIns="0" bIns="0">
+            <a:spAutoFit/>
+          </a:bodyPr>
+          <a:lstStyle/>
+          <a:p>
+            <a:pPr algn="ctr"/>
+            <a:r>
+              <a:rPr sz="3200" b="1">
+                <a:solidFill>
+                  <a:srgbClr val="1A1A18"/>
+                </a:solidFill>
+                <a:latin typeface="DM Serif Display"/>
+              </a:rPr>
+              <a:t>Stap 0 · </a:t>
+            </a:r>
+            <a:r>
+              <a:rPr sz="3200" b="1">
+                <a:solidFill>
+                  <a:srgbClr val="2D6A4F"/>
+                </a:solidFill>
+                <a:latin typeface="DM Serif Display"/>
+              </a:rPr>
+              <a:t>Analyseer de buitenste schil</a:t>
+            </a:r>
+          </a:p>
+        </p:txBody>
+      </p:sp>
+      <p:sp>
+        <p:nvSpPr>
+          <p:cNvPr id="5" name="Rounded Rectangle 4"/>
           <p:cNvSpPr/>
           <p:nvPr/>
         </p:nvSpPr>
         <p:spPr>
           <a:xfrm>
-            <a:off x="3682579" y="740664"/>
+            <a:off x="3682579" y="1563624"/>
             <a:ext cx="362534" cy="566928"/>
           </a:xfrm>
           <a:prstGeom prst="roundRect">
@@ -3493,7 +3548,7 @@
       </p:sp>
       <p:pic>
         <p:nvPicPr>
-          <p:cNvPr id="5" name="Picture 4" descr="opgave.png"/>
+          <p:cNvPr id="6" name="Picture 5" descr="opgave.png"/>
           <p:cNvPicPr>
             <a:picLocks noChangeAspect="1"/>
           </p:cNvPicPr>
@@ -3507,7 +3562,7 @@
         </p:blipFill>
         <p:spPr>
           <a:xfrm>
-            <a:off x="3108960" y="777240"/>
+            <a:off x="3108960" y="1600200"/>
             <a:ext cx="4754880" cy="542554"/>
           </a:xfrm>
           <a:prstGeom prst="rect">
@@ -3517,14 +3572,14 @@
       </p:pic>
       <p:sp>
         <p:nvSpPr>
-          <p:cNvPr id="6" name="Oval 5"/>
+          <p:cNvPr id="7" name="Oval 6"/>
           <p:cNvSpPr/>
           <p:nvPr/>
         </p:nvSpPr>
         <p:spPr>
           <a:xfrm>
-            <a:off x="4731540" y="630936"/>
-            <a:ext cx="480458" cy="835161"/>
+            <a:off x="4740684" y="1453896"/>
+            <a:ext cx="407306" cy="835161"/>
           </a:xfrm>
           <a:prstGeom prst="ellipse">
             <a:avLst/>
@@ -3561,14 +3616,14 @@
       </p:sp>
       <p:sp>
         <p:nvSpPr>
-          <p:cNvPr id="7" name="Oval 6"/>
+          <p:cNvPr id="8" name="Oval 7"/>
           <p:cNvSpPr/>
           <p:nvPr/>
         </p:nvSpPr>
         <p:spPr>
           <a:xfrm>
-            <a:off x="4990713" y="630936"/>
-            <a:ext cx="3056006" cy="835161"/>
+            <a:off x="5531985" y="1453896"/>
+            <a:ext cx="2505590" cy="835161"/>
           </a:xfrm>
           <a:prstGeom prst="ellipse">
             <a:avLst/>
@@ -3605,204 +3660,14 @@
       </p:sp>
       <p:sp>
         <p:nvSpPr>
-          <p:cNvPr id="8" name="TextBox 7"/>
-          <p:cNvSpPr txBox="1"/>
-          <p:nvPr/>
-        </p:nvSpPr>
-        <p:spPr>
-          <a:xfrm>
-            <a:off x="5212080" y="1783080"/>
-            <a:ext cx="548640" cy="365760"/>
-          </a:xfrm>
-          <a:prstGeom prst="rect">
-            <a:avLst/>
-          </a:prstGeom>
-          <a:noFill/>
-        </p:spPr>
-        <p:txBody>
-          <a:bodyPr wrap="square" lIns="0" rIns="0" tIns="0" bIns="0">
-            <a:spAutoFit/>
-          </a:bodyPr>
-          <a:lstStyle/>
-          <a:p>
-            <a:pPr algn="ctr"/>
-            <a:r>
-              <a:rPr sz="2200" b="0">
-                <a:solidFill>
-                  <a:srgbClr val="7A7870"/>
-                </a:solidFill>
-                <a:latin typeface="DM Sans"/>
-              </a:rPr>
-              <a:t>↓</a:t>
-            </a:r>
-          </a:p>
-        </p:txBody>
-      </p:sp>
-      <p:pic>
-        <p:nvPicPr>
-          <p:cNvPr id="9" name="Picture 8" descr="opgave.png"/>
-          <p:cNvPicPr>
-            <a:picLocks noChangeAspect="1"/>
-          </p:cNvPicPr>
-          <p:nvPr/>
-        </p:nvPicPr>
-        <p:blipFill>
-          <a:blip r:embed="rId3"/>
-          <a:stretch>
-            <a:fillRect/>
-          </a:stretch>
-        </p:blipFill>
-        <p:spPr>
-          <a:xfrm>
-            <a:off x="3108960" y="2331720"/>
-            <a:ext cx="4754880" cy="542554"/>
-          </a:xfrm>
-          <a:prstGeom prst="rect">
-            <a:avLst/>
-          </a:prstGeom>
-        </p:spPr>
-      </p:pic>
-      <p:cxnSp>
-        <p:nvCxnSpPr>
-          <p:cNvPr id="10" name="Connector 9"/>
-          <p:cNvCxnSpPr/>
-          <p:nvPr/>
-        </p:nvCxnSpPr>
-        <p:spPr>
-          <a:xfrm flipV="1">
-            <a:off x="4731540" y="2295144"/>
-            <a:ext cx="334154" cy="615705"/>
-          </a:xfrm>
-          <a:prstGeom prst="line">
-            <a:avLst/>
-          </a:prstGeom>
-          <a:ln w="31750">
-            <a:solidFill>
-              <a:srgbClr val="C94F4A"/>
-            </a:solidFill>
-          </a:ln>
-          <a:effectLst/>
-        </p:spPr>
-        <p:style>
-          <a:lnRef idx="2">
-            <a:schemeClr val="accent1"/>
-          </a:lnRef>
-          <a:fillRef idx="0">
-            <a:schemeClr val="accent1"/>
-          </a:fillRef>
-          <a:effectRef idx="1">
-            <a:schemeClr val="accent1"/>
-          </a:effectRef>
-          <a:fontRef idx="minor">
-            <a:schemeClr val="tx1"/>
-          </a:fontRef>
-        </p:style>
-      </p:cxnSp>
-      <p:sp>
-        <p:nvSpPr>
-          <p:cNvPr id="11" name="TextBox 10"/>
-          <p:cNvSpPr txBox="1"/>
-          <p:nvPr/>
-        </p:nvSpPr>
-        <p:spPr>
-          <a:xfrm>
-            <a:off x="5212080" y="3291840"/>
-            <a:ext cx="548640" cy="365760"/>
-          </a:xfrm>
-          <a:prstGeom prst="rect">
-            <a:avLst/>
-          </a:prstGeom>
-          <a:noFill/>
-        </p:spPr>
-        <p:txBody>
-          <a:bodyPr wrap="square" lIns="0" rIns="0" tIns="0" bIns="0">
-            <a:spAutoFit/>
-          </a:bodyPr>
-          <a:lstStyle/>
-          <a:p>
-            <a:pPr algn="ctr"/>
-            <a:r>
-              <a:rPr sz="2200" b="0">
-                <a:solidFill>
-                  <a:srgbClr val="7A7870"/>
-                </a:solidFill>
-                <a:latin typeface="DM Sans"/>
-              </a:rPr>
-              <a:t>↓</a:t>
-            </a:r>
-          </a:p>
-        </p:txBody>
-      </p:sp>
-      <p:pic>
-        <p:nvPicPr>
-          <p:cNvPr id="12" name="Picture 11" descr="opgave-product.png"/>
-          <p:cNvPicPr>
-            <a:picLocks noChangeAspect="1"/>
-          </p:cNvPicPr>
-          <p:nvPr/>
-        </p:nvPicPr>
-        <p:blipFill>
-          <a:blip r:embed="rId4"/>
-          <a:stretch>
-            <a:fillRect/>
-          </a:stretch>
-        </p:blipFill>
-        <p:spPr>
-          <a:xfrm>
-            <a:off x="2560320" y="3840480"/>
-            <a:ext cx="5852160" cy="467799"/>
-          </a:xfrm>
-          <a:prstGeom prst="rect">
-            <a:avLst/>
-          </a:prstGeom>
-        </p:spPr>
-      </p:pic>
-      <p:cxnSp>
-        <p:nvCxnSpPr>
-          <p:cNvPr id="13" name="Connector 12"/>
-          <p:cNvCxnSpPr/>
-          <p:nvPr/>
-        </p:nvCxnSpPr>
-        <p:spPr>
-          <a:xfrm flipV="1">
-            <a:off x="3923708" y="3803904"/>
-            <a:ext cx="300071" cy="540950"/>
-          </a:xfrm>
-          <a:prstGeom prst="line">
-            <a:avLst/>
-          </a:prstGeom>
-          <a:ln w="31750">
-            <a:solidFill>
-              <a:srgbClr val="C94F4A"/>
-            </a:solidFill>
-          </a:ln>
-          <a:effectLst/>
-        </p:spPr>
-        <p:style>
-          <a:lnRef idx="2">
-            <a:schemeClr val="accent1"/>
-          </a:lnRef>
-          <a:fillRef idx="0">
-            <a:schemeClr val="accent1"/>
-          </a:fillRef>
-          <a:effectRef idx="1">
-            <a:schemeClr val="accent1"/>
-          </a:effectRef>
-          <a:fontRef idx="minor">
-            <a:schemeClr val="tx1"/>
-          </a:fontRef>
-        </p:style>
-      </p:cxnSp>
-      <p:sp>
-        <p:nvSpPr>
-          <p:cNvPr id="14" name="Rounded Rectangle 13"/>
+          <p:cNvPr id="9" name="Rounded Rectangle 8"/>
           <p:cNvSpPr/>
           <p:nvPr/>
         </p:nvSpPr>
         <p:spPr>
           <a:xfrm>
-            <a:off x="4023360" y="5029200"/>
-            <a:ext cx="2926080" cy="502920"/>
+            <a:off x="4389120" y="3063240"/>
+            <a:ext cx="2194560" cy="502920"/>
           </a:xfrm>
           <a:prstGeom prst="roundRect">
             <a:avLst>
@@ -3810,7 +3675,7 @@
             </a:avLst>
           </a:prstGeom>
           <a:solidFill>
-            <a:srgbClr val="FBEEED"/>
+            <a:srgbClr val="E8F5EE"/>
           </a:solidFill>
           <a:ln>
             <a:noFill/>
@@ -3839,6 +3704,1151 @@
             <a:r>
               <a:rPr sz="1800" b="1">
                 <a:solidFill>
+                  <a:srgbClr val="2D6A4F"/>
+                </a:solidFill>
+                <a:latin typeface="DM Sans"/>
+              </a:rPr>
+              <a:t>Somregel!</a:t>
+            </a:r>
+          </a:p>
+        </p:txBody>
+      </p:sp>
+      <p:sp>
+        <p:nvSpPr>
+          <p:cNvPr id="10" name="Rounded Rectangle 9"/>
+          <p:cNvSpPr/>
+          <p:nvPr/>
+        </p:nvSpPr>
+        <p:spPr>
+          <a:xfrm>
+            <a:off x="2011680" y="4114800"/>
+            <a:ext cx="6949440" cy="777240"/>
+          </a:xfrm>
+          <a:prstGeom prst="roundRect">
+            <a:avLst>
+              <a:gd name="adj" fmla="val 12000"/>
+            </a:avLst>
+          </a:prstGeom>
+          <a:solidFill>
+            <a:srgbClr val="E8F5EE"/>
+          </a:solidFill>
+          <a:ln>
+            <a:noFill/>
+          </a:ln>
+          <a:effectLst/>
+        </p:spPr>
+        <p:style>
+          <a:lnRef idx="1">
+            <a:schemeClr val="accent1"/>
+          </a:lnRef>
+          <a:fillRef idx="3">
+            <a:schemeClr val="accent1"/>
+          </a:fillRef>
+          <a:effectRef idx="2">
+            <a:schemeClr val="accent1"/>
+          </a:effectRef>
+          <a:fontRef idx="minor">
+            <a:schemeClr val="lt1"/>
+          </a:fontRef>
+        </p:style>
+        <p:txBody>
+          <a:bodyPr rtlCol="0" anchor="ctr"/>
+          <a:lstStyle/>
+          <a:p>
+            <a:pPr algn="ctr"/>
+          </a:p>
+        </p:txBody>
+      </p:sp>
+      <p:pic>
+        <p:nvPicPr>
+          <p:cNvPr id="11" name="Picture 10" descr="regel-som.png"/>
+          <p:cNvPicPr>
+            <a:picLocks noChangeAspect="1"/>
+          </p:cNvPicPr>
+          <p:nvPr/>
+        </p:nvPicPr>
+        <p:blipFill>
+          <a:blip r:embed="rId4"/>
+          <a:stretch>
+            <a:fillRect/>
+          </a:stretch>
+        </p:blipFill>
+        <p:spPr>
+          <a:xfrm>
+            <a:off x="2468880" y="4297680"/>
+            <a:ext cx="6035040" cy="347412"/>
+          </a:xfrm>
+          <a:prstGeom prst="rect">
+            <a:avLst/>
+          </a:prstGeom>
+        </p:spPr>
+      </p:pic>
+    </p:spTree>
+  </p:cSld>
+  <p:clrMapOvr>
+    <a:masterClrMapping/>
+  </p:clrMapOvr>
+  <p:timing>
+    <p:tnLst>
+      <p:par>
+        <p:cTn id="1" dur="indefinite" restart="never" nodeType="tmRoot">
+          <p:childTnLst>
+            <p:seq concurrent="1" nextAc="seek">
+              <p:cTn id="2" dur="indefinite" nodeType="mainSeq">
+                <p:childTnLst>
+                  <p:par>
+                    <p:cTn id="6" fill="hold">
+                      <p:stCondLst>
+                        <p:cond delay="indefinite"/>
+                      </p:stCondLst>
+                      <p:childTnLst>
+                        <p:par>
+                          <p:cTn id="5" fill="hold">
+                            <p:stCondLst>
+                              <p:cond delay="0"/>
+                            </p:stCondLst>
+                            <p:childTnLst>
+                              <p:par>
+                                <p:cTn id="3" presetID="1" presetClass="entr" presetSubtype="0" fill="hold" grpId="0" nodeType="clickEffect">
+                                  <p:stCondLst>
+                                    <p:cond delay="0"/>
+                                  </p:stCondLst>
+                                  <p:childTnLst>
+                                    <p:set>
+                                      <p:cBhvr>
+                                        <p:cTn id="4" dur="1" fill="hold">
+                                          <p:stCondLst>
+                                            <p:cond delay="0"/>
+                                          </p:stCondLst>
+                                        </p:cTn>
+                                        <p:tgtEl>
+                                          <p:spTgt spid="6"/>
+                                        </p:tgtEl>
+                                        <p:attrNameLst>
+                                          <p:attrName>style.visibility</p:attrName>
+                                        </p:attrNameLst>
+                                      </p:cBhvr>
+                                      <p:to>
+                                        <p:strVal val="visible"/>
+                                      </p:to>
+                                    </p:set>
+                                  </p:childTnLst>
+                                </p:cTn>
+                              </p:par>
+                            </p:childTnLst>
+                          </p:cTn>
+                        </p:par>
+                      </p:childTnLst>
+                    </p:cTn>
+                  </p:par>
+                  <p:par>
+                    <p:cTn id="10" fill="hold">
+                      <p:stCondLst>
+                        <p:cond delay="indefinite"/>
+                      </p:stCondLst>
+                      <p:childTnLst>
+                        <p:par>
+                          <p:cTn id="9" fill="hold">
+                            <p:stCondLst>
+                              <p:cond delay="0"/>
+                            </p:stCondLst>
+                            <p:childTnLst>
+                              <p:par>
+                                <p:cTn id="7" presetID="1" presetClass="entr" presetSubtype="0" fill="hold" grpId="0" nodeType="clickEffect">
+                                  <p:stCondLst>
+                                    <p:cond delay="0"/>
+                                  </p:stCondLst>
+                                  <p:childTnLst>
+                                    <p:set>
+                                      <p:cBhvr>
+                                        <p:cTn id="8" dur="1" fill="hold">
+                                          <p:stCondLst>
+                                            <p:cond delay="0"/>
+                                          </p:stCondLst>
+                                        </p:cTn>
+                                        <p:tgtEl>
+                                          <p:spTgt spid="5"/>
+                                        </p:tgtEl>
+                                        <p:attrNameLst>
+                                          <p:attrName>style.visibility</p:attrName>
+                                        </p:attrNameLst>
+                                      </p:cBhvr>
+                                      <p:to>
+                                        <p:strVal val="visible"/>
+                                      </p:to>
+                                    </p:set>
+                                  </p:childTnLst>
+                                </p:cTn>
+                              </p:par>
+                            </p:childTnLst>
+                          </p:cTn>
+                        </p:par>
+                      </p:childTnLst>
+                    </p:cTn>
+                  </p:par>
+                  <p:par>
+                    <p:cTn id="14" fill="hold">
+                      <p:stCondLst>
+                        <p:cond delay="indefinite"/>
+                      </p:stCondLst>
+                      <p:childTnLst>
+                        <p:par>
+                          <p:cTn id="13" fill="hold">
+                            <p:stCondLst>
+                              <p:cond delay="0"/>
+                            </p:stCondLst>
+                            <p:childTnLst>
+                              <p:par>
+                                <p:cTn id="11" presetID="1" presetClass="exit" presetSubtype="0" fill="hold" grpId="0" nodeType="clickEffect">
+                                  <p:stCondLst>
+                                    <p:cond delay="0"/>
+                                  </p:stCondLst>
+                                  <p:childTnLst>
+                                    <p:set>
+                                      <p:cBhvr>
+                                        <p:cTn id="12" dur="1" fill="hold">
+                                          <p:stCondLst>
+                                            <p:cond delay="0"/>
+                                          </p:stCondLst>
+                                        </p:cTn>
+                                        <p:tgtEl>
+                                          <p:spTgt spid="5"/>
+                                        </p:tgtEl>
+                                        <p:attrNameLst>
+                                          <p:attrName>style.visibility</p:attrName>
+                                        </p:attrNameLst>
+                                      </p:cBhvr>
+                                      <p:to>
+                                        <p:strVal val="hidden"/>
+                                      </p:to>
+                                    </p:set>
+                                  </p:childTnLst>
+                                </p:cTn>
+                              </p:par>
+                            </p:childTnLst>
+                          </p:cTn>
+                        </p:par>
+                      </p:childTnLst>
+                    </p:cTn>
+                  </p:par>
+                  <p:par>
+                    <p:cTn id="18" fill="hold">
+                      <p:stCondLst>
+                        <p:cond delay="indefinite"/>
+                      </p:stCondLst>
+                      <p:childTnLst>
+                        <p:par>
+                          <p:cTn id="17" fill="hold">
+                            <p:stCondLst>
+                              <p:cond delay="0"/>
+                            </p:stCondLst>
+                            <p:childTnLst>
+                              <p:par>
+                                <p:cTn id="15" presetID="1" presetClass="entr" presetSubtype="0" fill="hold" grpId="0" nodeType="clickEffect">
+                                  <p:stCondLst>
+                                    <p:cond delay="0"/>
+                                  </p:stCondLst>
+                                  <p:childTnLst>
+                                    <p:set>
+                                      <p:cBhvr>
+                                        <p:cTn id="16" dur="1" fill="hold">
+                                          <p:stCondLst>
+                                            <p:cond delay="0"/>
+                                          </p:stCondLst>
+                                        </p:cTn>
+                                        <p:tgtEl>
+                                          <p:spTgt spid="7"/>
+                                        </p:tgtEl>
+                                        <p:attrNameLst>
+                                          <p:attrName>style.visibility</p:attrName>
+                                        </p:attrNameLst>
+                                      </p:cBhvr>
+                                      <p:to>
+                                        <p:strVal val="visible"/>
+                                      </p:to>
+                                    </p:set>
+                                  </p:childTnLst>
+                                </p:cTn>
+                              </p:par>
+                            </p:childTnLst>
+                          </p:cTn>
+                        </p:par>
+                      </p:childTnLst>
+                    </p:cTn>
+                  </p:par>
+                  <p:par>
+                    <p:cTn id="22" fill="hold">
+                      <p:stCondLst>
+                        <p:cond delay="indefinite"/>
+                      </p:stCondLst>
+                      <p:childTnLst>
+                        <p:par>
+                          <p:cTn id="21" fill="hold">
+                            <p:stCondLst>
+                              <p:cond delay="0"/>
+                            </p:stCondLst>
+                            <p:childTnLst>
+                              <p:par>
+                                <p:cTn id="19" presetID="1" presetClass="entr" presetSubtype="0" fill="hold" grpId="0" nodeType="clickEffect">
+                                  <p:stCondLst>
+                                    <p:cond delay="0"/>
+                                  </p:stCondLst>
+                                  <p:childTnLst>
+                                    <p:set>
+                                      <p:cBhvr>
+                                        <p:cTn id="20" dur="1" fill="hold">
+                                          <p:stCondLst>
+                                            <p:cond delay="0"/>
+                                          </p:stCondLst>
+                                        </p:cTn>
+                                        <p:tgtEl>
+                                          <p:spTgt spid="8"/>
+                                        </p:tgtEl>
+                                        <p:attrNameLst>
+                                          <p:attrName>style.visibility</p:attrName>
+                                        </p:attrNameLst>
+                                      </p:cBhvr>
+                                      <p:to>
+                                        <p:strVal val="visible"/>
+                                      </p:to>
+                                    </p:set>
+                                  </p:childTnLst>
+                                </p:cTn>
+                              </p:par>
+                            </p:childTnLst>
+                          </p:cTn>
+                        </p:par>
+                      </p:childTnLst>
+                    </p:cTn>
+                  </p:par>
+                  <p:par>
+                    <p:cTn id="26" fill="hold">
+                      <p:stCondLst>
+                        <p:cond delay="indefinite"/>
+                      </p:stCondLst>
+                      <p:childTnLst>
+                        <p:par>
+                          <p:cTn id="25" fill="hold">
+                            <p:stCondLst>
+                              <p:cond delay="0"/>
+                            </p:stCondLst>
+                            <p:childTnLst>
+                              <p:par>
+                                <p:cTn id="23" presetID="1" presetClass="entr" presetSubtype="0" fill="hold" grpId="0" nodeType="clickEffect">
+                                  <p:stCondLst>
+                                    <p:cond delay="0"/>
+                                  </p:stCondLst>
+                                  <p:childTnLst>
+                                    <p:set>
+                                      <p:cBhvr>
+                                        <p:cTn id="24" dur="1" fill="hold">
+                                          <p:stCondLst>
+                                            <p:cond delay="0"/>
+                                          </p:stCondLst>
+                                        </p:cTn>
+                                        <p:tgtEl>
+                                          <p:spTgt spid="9"/>
+                                        </p:tgtEl>
+                                        <p:attrNameLst>
+                                          <p:attrName>style.visibility</p:attrName>
+                                        </p:attrNameLst>
+                                      </p:cBhvr>
+                                      <p:to>
+                                        <p:strVal val="visible"/>
+                                      </p:to>
+                                    </p:set>
+                                  </p:childTnLst>
+                                </p:cTn>
+                              </p:par>
+                            </p:childTnLst>
+                          </p:cTn>
+                        </p:par>
+                      </p:childTnLst>
+                    </p:cTn>
+                  </p:par>
+                  <p:par>
+                    <p:cTn id="32" fill="hold">
+                      <p:stCondLst>
+                        <p:cond delay="indefinite"/>
+                      </p:stCondLst>
+                      <p:childTnLst>
+                        <p:par>
+                          <p:cTn id="31" fill="hold">
+                            <p:stCondLst>
+                              <p:cond delay="0"/>
+                            </p:stCondLst>
+                            <p:childTnLst>
+                              <p:par>
+                                <p:cTn id="27" presetID="1" presetClass="entr" presetSubtype="0" fill="hold" grpId="0" nodeType="clickEffect">
+                                  <p:stCondLst>
+                                    <p:cond delay="0"/>
+                                  </p:stCondLst>
+                                  <p:childTnLst>
+                                    <p:set>
+                                      <p:cBhvr>
+                                        <p:cTn id="28" dur="1" fill="hold">
+                                          <p:stCondLst>
+                                            <p:cond delay="0"/>
+                                          </p:stCondLst>
+                                        </p:cTn>
+                                        <p:tgtEl>
+                                          <p:spTgt spid="10"/>
+                                        </p:tgtEl>
+                                        <p:attrNameLst>
+                                          <p:attrName>style.visibility</p:attrName>
+                                        </p:attrNameLst>
+                                      </p:cBhvr>
+                                      <p:to>
+                                        <p:strVal val="visible"/>
+                                      </p:to>
+                                    </p:set>
+                                  </p:childTnLst>
+                                </p:cTn>
+                              </p:par>
+                              <p:par>
+                                <p:cTn id="29" presetID="1" presetClass="entr" presetSubtype="0" fill="hold" grpId="0" nodeType="withEffect">
+                                  <p:stCondLst>
+                                    <p:cond delay="0"/>
+                                  </p:stCondLst>
+                                  <p:childTnLst>
+                                    <p:set>
+                                      <p:cBhvr>
+                                        <p:cTn id="30" dur="1" fill="hold">
+                                          <p:stCondLst>
+                                            <p:cond delay="0"/>
+                                          </p:stCondLst>
+                                        </p:cTn>
+                                        <p:tgtEl>
+                                          <p:spTgt spid="11"/>
+                                        </p:tgtEl>
+                                        <p:attrNameLst>
+                                          <p:attrName>style.visibility</p:attrName>
+                                        </p:attrNameLst>
+                                      </p:cBhvr>
+                                      <p:to>
+                                        <p:strVal val="visible"/>
+                                      </p:to>
+                                    </p:set>
+                                  </p:childTnLst>
+                                </p:cTn>
+                              </p:par>
+                            </p:childTnLst>
+                          </p:cTn>
+                        </p:par>
+                      </p:childTnLst>
+                    </p:cTn>
+                  </p:par>
+                </p:childTnLst>
+              </p:cTn>
+              <p:prevCondLst>
+                <p:cond evt="onPrev" delay="0">
+                  <p:tgtEl>
+                    <p:sldTgt/>
+                  </p:tgtEl>
+                </p:cond>
+              </p:prevCondLst>
+              <p:nextCondLst>
+                <p:cond evt="onNext" delay="0">
+                  <p:tgtEl>
+                    <p:sldTgt/>
+                  </p:tgtEl>
+                </p:cond>
+              </p:nextCondLst>
+            </p:seq>
+          </p:childTnLst>
+        </p:cTn>
+      </p:par>
+    </p:tnLst>
+    <p:bldLst>
+      <p:bldP spid="6" grpId="0"/>
+      <p:bldP spid="5" grpId="0"/>
+      <p:bldP spid="5" grpId="0"/>
+      <p:bldP spid="7" grpId="0"/>
+      <p:bldP spid="8" grpId="0"/>
+      <p:bldP spid="9" grpId="0"/>
+      <p:bldP spid="10" grpId="0"/>
+      <p:bldP spid="11" grpId="0"/>
+    </p:bldLst>
+  </p:timing>
+</p:sld>
+</file>
+
+<file path=ppt/slides/slide3.xml><?xml version="1.0" encoding="utf-8"?>
+<p:sld xmlns:a="http://schemas.openxmlformats.org/drawingml/2006/main" xmlns:p="http://schemas.openxmlformats.org/presentationml/2006/main" xmlns:r="http://schemas.openxmlformats.org/officeDocument/2006/relationships">
+  <p:cSld>
+    <p:spTree>
+      <p:nvGrpSpPr>
+        <p:cNvPr id="1" name=""/>
+        <p:cNvGrpSpPr/>
+        <p:nvPr/>
+      </p:nvGrpSpPr>
+      <p:grpSpPr/>
+      <p:sp>
+        <p:nvSpPr>
+          <p:cNvPr id="2" name="TextBox 1"/>
+          <p:cNvSpPr txBox="1"/>
+          <p:nvPr/>
+        </p:nvSpPr>
+        <p:spPr>
+          <a:xfrm>
+            <a:off x="8625535" y="201168"/>
+            <a:ext cx="3291840" cy="365760"/>
+          </a:xfrm>
+          <a:prstGeom prst="rect">
+            <a:avLst/>
+          </a:prstGeom>
+          <a:noFill/>
+        </p:spPr>
+        <p:txBody>
+          <a:bodyPr wrap="square" lIns="0" rIns="0" tIns="0" bIns="0">
+            <a:spAutoFit/>
+          </a:bodyPr>
+          <a:lstStyle/>
+          <a:p>
+            <a:pPr algn="r"/>
+            <a:r>
+              <a:rPr sz="1800" b="0">
+                <a:solidFill>
+                  <a:srgbClr val="1A1A18"/>
+                </a:solidFill>
+                <a:latin typeface="DM Serif Display"/>
+              </a:rPr>
+              <a:t>afgeleide</a:t>
+            </a:r>
+            <a:r>
+              <a:rPr sz="1800" b="0">
+                <a:solidFill>
+                  <a:srgbClr val="2D6A4F"/>
+                </a:solidFill>
+                <a:latin typeface="DM Serif Display"/>
+              </a:rPr>
+              <a:t>oefenen</a:t>
+            </a:r>
+            <a:r>
+              <a:rPr sz="1800" b="0">
+                <a:solidFill>
+                  <a:srgbClr val="1A1A18"/>
+                </a:solidFill>
+                <a:latin typeface="DM Serif Display"/>
+              </a:rPr>
+              <a:t>.nl</a:t>
+            </a:r>
+          </a:p>
+        </p:txBody>
+      </p:sp>
+      <p:pic>
+        <p:nvPicPr>
+          <p:cNvPr id="3" name="Picture 2" descr="aaf-point.png"/>
+          <p:cNvPicPr>
+            <a:picLocks noChangeAspect="1"/>
+          </p:cNvPicPr>
+          <p:nvPr/>
+        </p:nvPicPr>
+        <p:blipFill>
+          <a:blip r:embed="rId2"/>
+          <a:stretch>
+            <a:fillRect/>
+          </a:stretch>
+        </p:blipFill>
+        <p:spPr>
+          <a:xfrm>
+            <a:off x="10235895" y="4526280"/>
+            <a:ext cx="1635760" cy="2103120"/>
+          </a:xfrm>
+          <a:prstGeom prst="rect">
+            <a:avLst/>
+          </a:prstGeom>
+        </p:spPr>
+      </p:pic>
+      <p:sp>
+        <p:nvSpPr>
+          <p:cNvPr id="4" name="TextBox 3"/>
+          <p:cNvSpPr txBox="1"/>
+          <p:nvPr/>
+        </p:nvSpPr>
+        <p:spPr>
+          <a:xfrm>
+            <a:off x="914400" y="228600"/>
+            <a:ext cx="9144000" cy="640080"/>
+          </a:xfrm>
+          <a:prstGeom prst="rect">
+            <a:avLst/>
+          </a:prstGeom>
+          <a:noFill/>
+        </p:spPr>
+        <p:txBody>
+          <a:bodyPr wrap="square" lIns="0" rIns="0" tIns="0" bIns="0">
+            <a:spAutoFit/>
+          </a:bodyPr>
+          <a:lstStyle/>
+          <a:p>
+            <a:pPr algn="ctr"/>
+            <a:r>
+              <a:rPr sz="3200" b="1">
+                <a:solidFill>
+                  <a:srgbClr val="1A1A18"/>
+                </a:solidFill>
+                <a:latin typeface="DM Serif Display"/>
+              </a:rPr>
+              <a:t>De </a:t>
+            </a:r>
+            <a:r>
+              <a:rPr sz="3200" b="1">
+                <a:solidFill>
+                  <a:srgbClr val="2D6A4F"/>
+                </a:solidFill>
+                <a:latin typeface="DM Serif Display"/>
+              </a:rPr>
+              <a:t>somregel</a:t>
+            </a:r>
+          </a:p>
+        </p:txBody>
+      </p:sp>
+      <p:sp>
+        <p:nvSpPr>
+          <p:cNvPr id="5" name="Rounded Rectangle 4"/>
+          <p:cNvSpPr/>
+          <p:nvPr/>
+        </p:nvSpPr>
+        <p:spPr>
+          <a:xfrm>
+            <a:off x="2011680" y="868680"/>
+            <a:ext cx="6949440" cy="777240"/>
+          </a:xfrm>
+          <a:prstGeom prst="roundRect">
+            <a:avLst>
+              <a:gd name="adj" fmla="val 12000"/>
+            </a:avLst>
+          </a:prstGeom>
+          <a:solidFill>
+            <a:srgbClr val="E8F5EE"/>
+          </a:solidFill>
+          <a:ln>
+            <a:noFill/>
+          </a:ln>
+          <a:effectLst/>
+        </p:spPr>
+        <p:style>
+          <a:lnRef idx="1">
+            <a:schemeClr val="accent1"/>
+          </a:lnRef>
+          <a:fillRef idx="3">
+            <a:schemeClr val="accent1"/>
+          </a:fillRef>
+          <a:effectRef idx="2">
+            <a:schemeClr val="accent1"/>
+          </a:effectRef>
+          <a:fontRef idx="minor">
+            <a:schemeClr val="lt1"/>
+          </a:fontRef>
+        </p:style>
+        <p:txBody>
+          <a:bodyPr rtlCol="0" anchor="ctr"/>
+          <a:lstStyle/>
+          <a:p>
+            <a:pPr algn="ctr"/>
+          </a:p>
+        </p:txBody>
+      </p:sp>
+      <p:pic>
+        <p:nvPicPr>
+          <p:cNvPr id="6" name="Picture 5" descr="regel-som.png"/>
+          <p:cNvPicPr>
+            <a:picLocks noChangeAspect="1"/>
+          </p:cNvPicPr>
+          <p:nvPr/>
+        </p:nvPicPr>
+        <p:blipFill>
+          <a:blip r:embed="rId3"/>
+          <a:stretch>
+            <a:fillRect/>
+          </a:stretch>
+        </p:blipFill>
+        <p:spPr>
+          <a:xfrm>
+            <a:off x="2468880" y="1051560"/>
+            <a:ext cx="6035040" cy="347412"/>
+          </a:xfrm>
+          <a:prstGeom prst="rect">
+            <a:avLst/>
+          </a:prstGeom>
+        </p:spPr>
+      </p:pic>
+      <p:pic>
+        <p:nvPicPr>
+          <p:cNvPr id="7" name="Picture 6" descr="opgave.png"/>
+          <p:cNvPicPr>
+            <a:picLocks noChangeAspect="1"/>
+          </p:cNvPicPr>
+          <p:nvPr/>
+        </p:nvPicPr>
+        <p:blipFill>
+          <a:blip r:embed="rId4"/>
+          <a:stretch>
+            <a:fillRect/>
+          </a:stretch>
+        </p:blipFill>
+        <p:spPr>
+          <a:xfrm>
+            <a:off x="3474720" y="1874519"/>
+            <a:ext cx="4023360" cy="459084"/>
+          </a:xfrm>
+          <a:prstGeom prst="rect">
+            <a:avLst/>
+          </a:prstGeom>
+        </p:spPr>
+      </p:pic>
+      <p:sp>
+        <p:nvSpPr>
+          <p:cNvPr id="8" name="TextBox 7"/>
+          <p:cNvSpPr txBox="1"/>
+          <p:nvPr/>
+        </p:nvSpPr>
+        <p:spPr>
+          <a:xfrm>
+            <a:off x="4436896" y="2351890"/>
+            <a:ext cx="914400" cy="292608"/>
+          </a:xfrm>
+          <a:prstGeom prst="rect">
+            <a:avLst/>
+          </a:prstGeom>
+          <a:noFill/>
+        </p:spPr>
+        <p:txBody>
+          <a:bodyPr wrap="square" lIns="0" rIns="0" tIns="0" bIns="0">
+            <a:spAutoFit/>
+          </a:bodyPr>
+          <a:lstStyle/>
+          <a:p>
+            <a:pPr algn="ctr"/>
+            <a:r>
+              <a:rPr sz="1500" b="1">
+                <a:solidFill>
+                  <a:srgbClr val="2D6A4F"/>
+                </a:solidFill>
+                <a:latin typeface="DM Serif Display"/>
+              </a:rPr>
+              <a:t>g(q)</a:t>
+            </a:r>
+          </a:p>
+        </p:txBody>
+      </p:sp>
+      <p:sp>
+        <p:nvSpPr>
+          <p:cNvPr id="9" name="TextBox 8"/>
+          <p:cNvSpPr txBox="1"/>
+          <p:nvPr/>
+        </p:nvSpPr>
+        <p:spPr>
+          <a:xfrm>
+            <a:off x="5868223" y="2351890"/>
+            <a:ext cx="914400" cy="292608"/>
+          </a:xfrm>
+          <a:prstGeom prst="rect">
+            <a:avLst/>
+          </a:prstGeom>
+          <a:noFill/>
+        </p:spPr>
+        <p:txBody>
+          <a:bodyPr wrap="square" lIns="0" rIns="0" tIns="0" bIns="0">
+            <a:spAutoFit/>
+          </a:bodyPr>
+          <a:lstStyle/>
+          <a:p>
+            <a:pPr algn="ctr"/>
+            <a:r>
+              <a:rPr sz="1500" b="1">
+                <a:solidFill>
+                  <a:srgbClr val="2D6A4F"/>
+                </a:solidFill>
+                <a:latin typeface="DM Serif Display"/>
+              </a:rPr>
+              <a:t>h(q)</a:t>
+            </a:r>
+          </a:p>
+        </p:txBody>
+      </p:sp>
+      <p:sp>
+        <p:nvSpPr>
+          <p:cNvPr id="10" name="Rounded Rectangle 9"/>
+          <p:cNvSpPr/>
+          <p:nvPr/>
+        </p:nvSpPr>
+        <p:spPr>
+          <a:xfrm>
+            <a:off x="685800" y="2788920"/>
+            <a:ext cx="2651760" cy="384048"/>
+          </a:xfrm>
+          <a:prstGeom prst="roundRect">
+            <a:avLst>
+              <a:gd name="adj" fmla="val 50000"/>
+            </a:avLst>
+          </a:prstGeom>
+          <a:solidFill>
+            <a:srgbClr val="2D6A4F"/>
+          </a:solidFill>
+          <a:ln>
+            <a:noFill/>
+          </a:ln>
+          <a:effectLst/>
+        </p:spPr>
+        <p:style>
+          <a:lnRef idx="1">
+            <a:schemeClr val="accent1"/>
+          </a:lnRef>
+          <a:fillRef idx="3">
+            <a:schemeClr val="accent1"/>
+          </a:fillRef>
+          <a:effectRef idx="2">
+            <a:schemeClr val="accent1"/>
+          </a:effectRef>
+          <a:fontRef idx="minor">
+            <a:schemeClr val="lt1"/>
+          </a:fontRef>
+        </p:style>
+        <p:txBody>
+          <a:bodyPr rtlCol="0" anchor="ctr" lIns="76200" rIns="76200"/>
+          <a:lstStyle/>
+          <a:p>
+            <a:pPr algn="ctr"/>
+            <a:r>
+              <a:rPr sz="1300" b="1">
+                <a:solidFill>
+                  <a:srgbClr val="FFFFFF"/>
+                </a:solidFill>
+                <a:latin typeface="DM Sans"/>
+              </a:rPr>
+              <a:t>Stap 1 · kies g en h</a:t>
+            </a:r>
+          </a:p>
+        </p:txBody>
+      </p:sp>
+      <p:pic>
+        <p:nvPicPr>
+          <p:cNvPr id="11" name="Picture 10" descr="som-g-def.png"/>
+          <p:cNvPicPr>
+            <a:picLocks noChangeAspect="1"/>
+          </p:cNvPicPr>
+          <p:nvPr/>
+        </p:nvPicPr>
+        <p:blipFill>
+          <a:blip r:embed="rId5"/>
+          <a:stretch>
+            <a:fillRect/>
+          </a:stretch>
+        </p:blipFill>
+        <p:spPr>
+          <a:xfrm>
+            <a:off x="3589020" y="2743200"/>
+            <a:ext cx="1234440" cy="353379"/>
+          </a:xfrm>
+          <a:prstGeom prst="rect">
+            <a:avLst/>
+          </a:prstGeom>
+        </p:spPr>
+      </p:pic>
+      <p:pic>
+        <p:nvPicPr>
+          <p:cNvPr id="12" name="Picture 11" descr="som-h-def.png"/>
+          <p:cNvPicPr>
+            <a:picLocks noChangeAspect="1"/>
+          </p:cNvPicPr>
+          <p:nvPr/>
+        </p:nvPicPr>
+        <p:blipFill>
+          <a:blip r:embed="rId6"/>
+          <a:stretch>
+            <a:fillRect/>
+          </a:stretch>
+        </p:blipFill>
+        <p:spPr>
+          <a:xfrm>
+            <a:off x="5486400" y="2743200"/>
+            <a:ext cx="2743200" cy="406586"/>
+          </a:xfrm>
+          <a:prstGeom prst="rect">
+            <a:avLst/>
+          </a:prstGeom>
+        </p:spPr>
+      </p:pic>
+      <p:sp>
+        <p:nvSpPr>
+          <p:cNvPr id="13" name="Rounded Rectangle 12"/>
+          <p:cNvSpPr/>
+          <p:nvPr/>
+        </p:nvSpPr>
+        <p:spPr>
+          <a:xfrm>
+            <a:off x="685800" y="3429000"/>
+            <a:ext cx="2651760" cy="384048"/>
+          </a:xfrm>
+          <a:prstGeom prst="roundRect">
+            <a:avLst>
+              <a:gd name="adj" fmla="val 50000"/>
+            </a:avLst>
+          </a:prstGeom>
+          <a:solidFill>
+            <a:srgbClr val="2D6A4F"/>
+          </a:solidFill>
+          <a:ln>
+            <a:noFill/>
+          </a:ln>
+          <a:effectLst/>
+        </p:spPr>
+        <p:style>
+          <a:lnRef idx="1">
+            <a:schemeClr val="accent1"/>
+          </a:lnRef>
+          <a:fillRef idx="3">
+            <a:schemeClr val="accent1"/>
+          </a:fillRef>
+          <a:effectRef idx="2">
+            <a:schemeClr val="accent1"/>
+          </a:effectRef>
+          <a:fontRef idx="minor">
+            <a:schemeClr val="lt1"/>
+          </a:fontRef>
+        </p:style>
+        <p:txBody>
+          <a:bodyPr rtlCol="0" anchor="ctr" lIns="76200" rIns="76200"/>
+          <a:lstStyle/>
+          <a:p>
+            <a:pPr algn="ctr"/>
+            <a:r>
+              <a:rPr sz="1300" b="1">
+                <a:solidFill>
+                  <a:srgbClr val="FFFFFF"/>
+                </a:solidFill>
+                <a:latin typeface="DM Sans"/>
+              </a:rPr>
+              <a:t>Stap 2 · bereken g′ en h′</a:t>
+            </a:r>
+          </a:p>
+        </p:txBody>
+      </p:sp>
+      <p:pic>
+        <p:nvPicPr>
+          <p:cNvPr id="14" name="Picture 13" descr="som-g-afgeleide.png"/>
+          <p:cNvPicPr>
+            <a:picLocks noChangeAspect="1"/>
+          </p:cNvPicPr>
+          <p:nvPr/>
+        </p:nvPicPr>
+        <p:blipFill>
+          <a:blip r:embed="rId7"/>
+          <a:stretch>
+            <a:fillRect/>
+          </a:stretch>
+        </p:blipFill>
+        <p:spPr>
+          <a:xfrm>
+            <a:off x="3589020" y="3383280"/>
+            <a:ext cx="1417320" cy="373244"/>
+          </a:xfrm>
+          <a:prstGeom prst="rect">
+            <a:avLst/>
+          </a:prstGeom>
+        </p:spPr>
+      </p:pic>
+      <p:sp>
+        <p:nvSpPr>
+          <p:cNvPr id="15" name="TextBox 14"/>
+          <p:cNvSpPr txBox="1"/>
+          <p:nvPr/>
+        </p:nvSpPr>
+        <p:spPr>
+          <a:xfrm>
+            <a:off x="5212080" y="3456432"/>
+            <a:ext cx="2743200" cy="310896"/>
+          </a:xfrm>
+          <a:prstGeom prst="rect">
+            <a:avLst/>
+          </a:prstGeom>
+          <a:noFill/>
+        </p:spPr>
+        <p:txBody>
+          <a:bodyPr wrap="square" lIns="0" rIns="0" tIns="0" bIns="0">
+            <a:spAutoFit/>
+          </a:bodyPr>
+          <a:lstStyle/>
+          <a:p>
+            <a:pPr algn="l"/>
+            <a:r>
+              <a:rPr sz="1200" b="0">
+                <a:solidFill>
+                  <a:srgbClr val="7A7870"/>
+                </a:solidFill>
+                <a:latin typeface="DM Sans"/>
+              </a:rPr>
+              <a:t>(er zit geen q in)</a:t>
+            </a:r>
+          </a:p>
+        </p:txBody>
+      </p:sp>
+      <p:pic>
+        <p:nvPicPr>
+          <p:cNvPr id="16" name="Picture 15" descr="som-h-def.png"/>
+          <p:cNvPicPr>
+            <a:picLocks noChangeAspect="1"/>
+          </p:cNvPicPr>
+          <p:nvPr/>
+        </p:nvPicPr>
+        <p:blipFill>
+          <a:blip r:embed="rId6"/>
+          <a:stretch>
+            <a:fillRect/>
+          </a:stretch>
+        </p:blipFill>
+        <p:spPr>
+          <a:xfrm>
+            <a:off x="4389120" y="4023360"/>
+            <a:ext cx="2743200" cy="406586"/>
+          </a:xfrm>
+          <a:prstGeom prst="rect">
+            <a:avLst/>
+          </a:prstGeom>
+        </p:spPr>
+      </p:pic>
+      <p:sp>
+        <p:nvSpPr>
+          <p:cNvPr id="17" name="TextBox 16"/>
+          <p:cNvSpPr txBox="1"/>
+          <p:nvPr/>
+        </p:nvSpPr>
+        <p:spPr>
+          <a:xfrm>
+            <a:off x="5486400" y="4526280"/>
+            <a:ext cx="548640" cy="365760"/>
+          </a:xfrm>
+          <a:prstGeom prst="rect">
+            <a:avLst/>
+          </a:prstGeom>
+          <a:noFill/>
+        </p:spPr>
+        <p:txBody>
+          <a:bodyPr wrap="square" lIns="0" rIns="0" tIns="0" bIns="0">
+            <a:spAutoFit/>
+          </a:bodyPr>
+          <a:lstStyle/>
+          <a:p>
+            <a:pPr algn="ctr"/>
+            <a:r>
+              <a:rPr sz="2200" b="0">
+                <a:solidFill>
+                  <a:srgbClr val="7A7870"/>
+                </a:solidFill>
+                <a:latin typeface="DM Sans"/>
+              </a:rPr>
+              <a:t>↓</a:t>
+            </a:r>
+          </a:p>
+        </p:txBody>
+      </p:sp>
+      <p:pic>
+        <p:nvPicPr>
+          <p:cNvPr id="18" name="Picture 17" descr="som-h-product.png"/>
+          <p:cNvPicPr>
+            <a:picLocks noChangeAspect="1"/>
+          </p:cNvPicPr>
+          <p:nvPr/>
+        </p:nvPicPr>
+        <p:blipFill>
+          <a:blip r:embed="rId8"/>
+          <a:stretch>
+            <a:fillRect/>
+          </a:stretch>
+        </p:blipFill>
+        <p:spPr>
+          <a:xfrm>
+            <a:off x="3657600" y="4983480"/>
+            <a:ext cx="4206240" cy="396861"/>
+          </a:xfrm>
+          <a:prstGeom prst="rect">
+            <a:avLst/>
+          </a:prstGeom>
+        </p:spPr>
+      </p:pic>
+      <p:sp>
+        <p:nvSpPr>
+          <p:cNvPr id="19" name="TextBox 18"/>
+          <p:cNvSpPr txBox="1"/>
+          <p:nvPr/>
+        </p:nvSpPr>
+        <p:spPr>
+          <a:xfrm>
+            <a:off x="3108960" y="5532120"/>
+            <a:ext cx="5303520" cy="310896"/>
+          </a:xfrm>
+          <a:prstGeom prst="rect">
+            <a:avLst/>
+          </a:prstGeom>
+          <a:noFill/>
+        </p:spPr>
+        <p:txBody>
+          <a:bodyPr wrap="square" lIns="0" rIns="0" tIns="0" bIns="0">
+            <a:spAutoFit/>
+          </a:bodyPr>
+          <a:lstStyle/>
+          <a:p>
+            <a:pPr algn="l"/>
+            <a:r>
+              <a:rPr sz="1200" b="0">
+                <a:solidFill>
+                  <a:srgbClr val="7A7870"/>
+                </a:solidFill>
+                <a:latin typeface="DM Sans"/>
+              </a:rPr>
+              <a:t>handig: schrijf een kwadraat altijd op als de term keer zichzelf</a:t>
+            </a:r>
+          </a:p>
+        </p:txBody>
+      </p:sp>
+      <p:sp>
+        <p:nvSpPr>
+          <p:cNvPr id="20" name="Rounded Rectangle 19"/>
+          <p:cNvSpPr/>
+          <p:nvPr/>
+        </p:nvSpPr>
+        <p:spPr>
+          <a:xfrm>
+            <a:off x="4206240" y="5989320"/>
+            <a:ext cx="2560320" cy="457200"/>
+          </a:xfrm>
+          <a:prstGeom prst="roundRect">
+            <a:avLst>
+              <a:gd name="adj" fmla="val 50000"/>
+            </a:avLst>
+          </a:prstGeom>
+          <a:solidFill>
+            <a:srgbClr val="FBEEED"/>
+          </a:solidFill>
+          <a:ln>
+            <a:noFill/>
+          </a:ln>
+          <a:effectLst/>
+        </p:spPr>
+        <p:style>
+          <a:lnRef idx="1">
+            <a:schemeClr val="accent1"/>
+          </a:lnRef>
+          <a:fillRef idx="3">
+            <a:schemeClr val="accent1"/>
+          </a:fillRef>
+          <a:effectRef idx="2">
+            <a:schemeClr val="accent1"/>
+          </a:effectRef>
+          <a:fontRef idx="minor">
+            <a:schemeClr val="lt1"/>
+          </a:fontRef>
+        </p:style>
+        <p:txBody>
+          <a:bodyPr rtlCol="0" anchor="ctr" lIns="76200" rIns="76200"/>
+          <a:lstStyle/>
+          <a:p>
+            <a:pPr algn="ctr"/>
+            <a:r>
+              <a:rPr sz="1600" b="1">
+                <a:solidFill>
                   <a:srgbClr val="C94F4A"/>
                 </a:solidFill>
                 <a:latin typeface="DM Sans"/>
@@ -3848,6 +4858,2060 @@
           </a:p>
         </p:txBody>
       </p:sp>
+    </p:spTree>
+  </p:cSld>
+  <p:clrMapOvr>
+    <a:masterClrMapping/>
+  </p:clrMapOvr>
+  <p:timing>
+    <p:tnLst>
+      <p:par>
+        <p:cTn id="1" dur="indefinite" restart="never" nodeType="tmRoot">
+          <p:childTnLst>
+            <p:seq concurrent="1" nextAc="seek">
+              <p:cTn id="2" dur="indefinite" nodeType="mainSeq">
+                <p:childTnLst>
+                  <p:par>
+                    <p:cTn id="6" fill="hold">
+                      <p:stCondLst>
+                        <p:cond delay="indefinite"/>
+                      </p:stCondLst>
+                      <p:childTnLst>
+                        <p:par>
+                          <p:cTn id="5" fill="hold">
+                            <p:stCondLst>
+                              <p:cond delay="0"/>
+                            </p:stCondLst>
+                            <p:childTnLst>
+                              <p:par>
+                                <p:cTn id="3" presetID="1" presetClass="entr" presetSubtype="0" fill="hold" grpId="0" nodeType="clickEffect">
+                                  <p:stCondLst>
+                                    <p:cond delay="0"/>
+                                  </p:stCondLst>
+                                  <p:childTnLst>
+                                    <p:set>
+                                      <p:cBhvr>
+                                        <p:cTn id="4" dur="1" fill="hold">
+                                          <p:stCondLst>
+                                            <p:cond delay="0"/>
+                                          </p:stCondLst>
+                                        </p:cTn>
+                                        <p:tgtEl>
+                                          <p:spTgt spid="10"/>
+                                        </p:tgtEl>
+                                        <p:attrNameLst>
+                                          <p:attrName>style.visibility</p:attrName>
+                                        </p:attrNameLst>
+                                      </p:cBhvr>
+                                      <p:to>
+                                        <p:strVal val="visible"/>
+                                      </p:to>
+                                    </p:set>
+                                  </p:childTnLst>
+                                </p:cTn>
+                              </p:par>
+                            </p:childTnLst>
+                          </p:cTn>
+                        </p:par>
+                      </p:childTnLst>
+                    </p:cTn>
+                  </p:par>
+                  <p:par>
+                    <p:cTn id="12" fill="hold">
+                      <p:stCondLst>
+                        <p:cond delay="indefinite"/>
+                      </p:stCondLst>
+                      <p:childTnLst>
+                        <p:par>
+                          <p:cTn id="11" fill="hold">
+                            <p:stCondLst>
+                              <p:cond delay="0"/>
+                            </p:stCondLst>
+                            <p:childTnLst>
+                              <p:par>
+                                <p:cTn id="7" presetID="1" presetClass="entr" presetSubtype="0" fill="hold" grpId="0" nodeType="clickEffect">
+                                  <p:stCondLst>
+                                    <p:cond delay="0"/>
+                                  </p:stCondLst>
+                                  <p:childTnLst>
+                                    <p:set>
+                                      <p:cBhvr>
+                                        <p:cTn id="8" dur="1" fill="hold">
+                                          <p:stCondLst>
+                                            <p:cond delay="0"/>
+                                          </p:stCondLst>
+                                        </p:cTn>
+                                        <p:tgtEl>
+                                          <p:spTgt spid="8"/>
+                                        </p:tgtEl>
+                                        <p:attrNameLst>
+                                          <p:attrName>style.visibility</p:attrName>
+                                        </p:attrNameLst>
+                                      </p:cBhvr>
+                                      <p:to>
+                                        <p:strVal val="visible"/>
+                                      </p:to>
+                                    </p:set>
+                                  </p:childTnLst>
+                                </p:cTn>
+                              </p:par>
+                              <p:par>
+                                <p:cTn id="9" presetID="1" presetClass="entr" presetSubtype="0" fill="hold" grpId="0" nodeType="withEffect">
+                                  <p:stCondLst>
+                                    <p:cond delay="0"/>
+                                  </p:stCondLst>
+                                  <p:childTnLst>
+                                    <p:set>
+                                      <p:cBhvr>
+                                        <p:cTn id="10" dur="1" fill="hold">
+                                          <p:stCondLst>
+                                            <p:cond delay="0"/>
+                                          </p:stCondLst>
+                                        </p:cTn>
+                                        <p:tgtEl>
+                                          <p:spTgt spid="9"/>
+                                        </p:tgtEl>
+                                        <p:attrNameLst>
+                                          <p:attrName>style.visibility</p:attrName>
+                                        </p:attrNameLst>
+                                      </p:cBhvr>
+                                      <p:to>
+                                        <p:strVal val="visible"/>
+                                      </p:to>
+                                    </p:set>
+                                  </p:childTnLst>
+                                </p:cTn>
+                              </p:par>
+                            </p:childTnLst>
+                          </p:cTn>
+                        </p:par>
+                      </p:childTnLst>
+                    </p:cTn>
+                  </p:par>
+                  <p:par>
+                    <p:cTn id="18" fill="hold">
+                      <p:stCondLst>
+                        <p:cond delay="indefinite"/>
+                      </p:stCondLst>
+                      <p:childTnLst>
+                        <p:par>
+                          <p:cTn id="17" fill="hold">
+                            <p:stCondLst>
+                              <p:cond delay="0"/>
+                            </p:stCondLst>
+                            <p:childTnLst>
+                              <p:par>
+                                <p:cTn id="13" presetID="1" presetClass="entr" presetSubtype="0" fill="hold" grpId="0" nodeType="clickEffect">
+                                  <p:stCondLst>
+                                    <p:cond delay="0"/>
+                                  </p:stCondLst>
+                                  <p:childTnLst>
+                                    <p:set>
+                                      <p:cBhvr>
+                                        <p:cTn id="14" dur="1" fill="hold">
+                                          <p:stCondLst>
+                                            <p:cond delay="0"/>
+                                          </p:stCondLst>
+                                        </p:cTn>
+                                        <p:tgtEl>
+                                          <p:spTgt spid="11"/>
+                                        </p:tgtEl>
+                                        <p:attrNameLst>
+                                          <p:attrName>style.visibility</p:attrName>
+                                        </p:attrNameLst>
+                                      </p:cBhvr>
+                                      <p:to>
+                                        <p:strVal val="visible"/>
+                                      </p:to>
+                                    </p:set>
+                                  </p:childTnLst>
+                                </p:cTn>
+                              </p:par>
+                              <p:par>
+                                <p:cTn id="15" presetID="1" presetClass="entr" presetSubtype="0" fill="hold" grpId="0" nodeType="withEffect">
+                                  <p:stCondLst>
+                                    <p:cond delay="0"/>
+                                  </p:stCondLst>
+                                  <p:childTnLst>
+                                    <p:set>
+                                      <p:cBhvr>
+                                        <p:cTn id="16" dur="1" fill="hold">
+                                          <p:stCondLst>
+                                            <p:cond delay="0"/>
+                                          </p:stCondLst>
+                                        </p:cTn>
+                                        <p:tgtEl>
+                                          <p:spTgt spid="12"/>
+                                        </p:tgtEl>
+                                        <p:attrNameLst>
+                                          <p:attrName>style.visibility</p:attrName>
+                                        </p:attrNameLst>
+                                      </p:cBhvr>
+                                      <p:to>
+                                        <p:strVal val="visible"/>
+                                      </p:to>
+                                    </p:set>
+                                  </p:childTnLst>
+                                </p:cTn>
+                              </p:par>
+                            </p:childTnLst>
+                          </p:cTn>
+                        </p:par>
+                      </p:childTnLst>
+                    </p:cTn>
+                  </p:par>
+                  <p:par>
+                    <p:cTn id="22" fill="hold">
+                      <p:stCondLst>
+                        <p:cond delay="indefinite"/>
+                      </p:stCondLst>
+                      <p:childTnLst>
+                        <p:par>
+                          <p:cTn id="21" fill="hold">
+                            <p:stCondLst>
+                              <p:cond delay="0"/>
+                            </p:stCondLst>
+                            <p:childTnLst>
+                              <p:par>
+                                <p:cTn id="19" presetID="1" presetClass="entr" presetSubtype="0" fill="hold" grpId="0" nodeType="clickEffect">
+                                  <p:stCondLst>
+                                    <p:cond delay="0"/>
+                                  </p:stCondLst>
+                                  <p:childTnLst>
+                                    <p:set>
+                                      <p:cBhvr>
+                                        <p:cTn id="20" dur="1" fill="hold">
+                                          <p:stCondLst>
+                                            <p:cond delay="0"/>
+                                          </p:stCondLst>
+                                        </p:cTn>
+                                        <p:tgtEl>
+                                          <p:spTgt spid="13"/>
+                                        </p:tgtEl>
+                                        <p:attrNameLst>
+                                          <p:attrName>style.visibility</p:attrName>
+                                        </p:attrNameLst>
+                                      </p:cBhvr>
+                                      <p:to>
+                                        <p:strVal val="visible"/>
+                                      </p:to>
+                                    </p:set>
+                                  </p:childTnLst>
+                                </p:cTn>
+                              </p:par>
+                            </p:childTnLst>
+                          </p:cTn>
+                        </p:par>
+                      </p:childTnLst>
+                    </p:cTn>
+                  </p:par>
+                  <p:par>
+                    <p:cTn id="28" fill="hold">
+                      <p:stCondLst>
+                        <p:cond delay="indefinite"/>
+                      </p:stCondLst>
+                      <p:childTnLst>
+                        <p:par>
+                          <p:cTn id="27" fill="hold">
+                            <p:stCondLst>
+                              <p:cond delay="0"/>
+                            </p:stCondLst>
+                            <p:childTnLst>
+                              <p:par>
+                                <p:cTn id="23" presetID="1" presetClass="entr" presetSubtype="0" fill="hold" grpId="0" nodeType="clickEffect">
+                                  <p:stCondLst>
+                                    <p:cond delay="0"/>
+                                  </p:stCondLst>
+                                  <p:childTnLst>
+                                    <p:set>
+                                      <p:cBhvr>
+                                        <p:cTn id="24" dur="1" fill="hold">
+                                          <p:stCondLst>
+                                            <p:cond delay="0"/>
+                                          </p:stCondLst>
+                                        </p:cTn>
+                                        <p:tgtEl>
+                                          <p:spTgt spid="14"/>
+                                        </p:tgtEl>
+                                        <p:attrNameLst>
+                                          <p:attrName>style.visibility</p:attrName>
+                                        </p:attrNameLst>
+                                      </p:cBhvr>
+                                      <p:to>
+                                        <p:strVal val="visible"/>
+                                      </p:to>
+                                    </p:set>
+                                  </p:childTnLst>
+                                </p:cTn>
+                              </p:par>
+                              <p:par>
+                                <p:cTn id="25" presetID="1" presetClass="entr" presetSubtype="0" fill="hold" grpId="0" nodeType="withEffect">
+                                  <p:stCondLst>
+                                    <p:cond delay="0"/>
+                                  </p:stCondLst>
+                                  <p:childTnLst>
+                                    <p:set>
+                                      <p:cBhvr>
+                                        <p:cTn id="26" dur="1" fill="hold">
+                                          <p:stCondLst>
+                                            <p:cond delay="0"/>
+                                          </p:stCondLst>
+                                        </p:cTn>
+                                        <p:tgtEl>
+                                          <p:spTgt spid="15"/>
+                                        </p:tgtEl>
+                                        <p:attrNameLst>
+                                          <p:attrName>style.visibility</p:attrName>
+                                        </p:attrNameLst>
+                                      </p:cBhvr>
+                                      <p:to>
+                                        <p:strVal val="visible"/>
+                                      </p:to>
+                                    </p:set>
+                                  </p:childTnLst>
+                                </p:cTn>
+                              </p:par>
+                            </p:childTnLst>
+                          </p:cTn>
+                        </p:par>
+                      </p:childTnLst>
+                    </p:cTn>
+                  </p:par>
+                  <p:par>
+                    <p:cTn id="32" fill="hold">
+                      <p:stCondLst>
+                        <p:cond delay="indefinite"/>
+                      </p:stCondLst>
+                      <p:childTnLst>
+                        <p:par>
+                          <p:cTn id="31" fill="hold">
+                            <p:stCondLst>
+                              <p:cond delay="0"/>
+                            </p:stCondLst>
+                            <p:childTnLst>
+                              <p:par>
+                                <p:cTn id="29" presetID="1" presetClass="entr" presetSubtype="0" fill="hold" grpId="0" nodeType="clickEffect">
+                                  <p:stCondLst>
+                                    <p:cond delay="0"/>
+                                  </p:stCondLst>
+                                  <p:childTnLst>
+                                    <p:set>
+                                      <p:cBhvr>
+                                        <p:cTn id="30" dur="1" fill="hold">
+                                          <p:stCondLst>
+                                            <p:cond delay="0"/>
+                                          </p:stCondLst>
+                                        </p:cTn>
+                                        <p:tgtEl>
+                                          <p:spTgt spid="16"/>
+                                        </p:tgtEl>
+                                        <p:attrNameLst>
+                                          <p:attrName>style.visibility</p:attrName>
+                                        </p:attrNameLst>
+                                      </p:cBhvr>
+                                      <p:to>
+                                        <p:strVal val="visible"/>
+                                      </p:to>
+                                    </p:set>
+                                  </p:childTnLst>
+                                </p:cTn>
+                              </p:par>
+                            </p:childTnLst>
+                          </p:cTn>
+                        </p:par>
+                      </p:childTnLst>
+                    </p:cTn>
+                  </p:par>
+                  <p:par>
+                    <p:cTn id="36" fill="hold">
+                      <p:stCondLst>
+                        <p:cond delay="indefinite"/>
+                      </p:stCondLst>
+                      <p:childTnLst>
+                        <p:par>
+                          <p:cTn id="35" fill="hold">
+                            <p:stCondLst>
+                              <p:cond delay="0"/>
+                            </p:stCondLst>
+                            <p:childTnLst>
+                              <p:par>
+                                <p:cTn id="33" presetID="1" presetClass="entr" presetSubtype="0" fill="hold" grpId="0" nodeType="clickEffect">
+                                  <p:stCondLst>
+                                    <p:cond delay="0"/>
+                                  </p:stCondLst>
+                                  <p:childTnLst>
+                                    <p:set>
+                                      <p:cBhvr>
+                                        <p:cTn id="34" dur="1" fill="hold">
+                                          <p:stCondLst>
+                                            <p:cond delay="0"/>
+                                          </p:stCondLst>
+                                        </p:cTn>
+                                        <p:tgtEl>
+                                          <p:spTgt spid="17"/>
+                                        </p:tgtEl>
+                                        <p:attrNameLst>
+                                          <p:attrName>style.visibility</p:attrName>
+                                        </p:attrNameLst>
+                                      </p:cBhvr>
+                                      <p:to>
+                                        <p:strVal val="visible"/>
+                                      </p:to>
+                                    </p:set>
+                                  </p:childTnLst>
+                                </p:cTn>
+                              </p:par>
+                            </p:childTnLst>
+                          </p:cTn>
+                        </p:par>
+                      </p:childTnLst>
+                    </p:cTn>
+                  </p:par>
+                  <p:par>
+                    <p:cTn id="40" fill="hold">
+                      <p:stCondLst>
+                        <p:cond delay="indefinite"/>
+                      </p:stCondLst>
+                      <p:childTnLst>
+                        <p:par>
+                          <p:cTn id="39" fill="hold">
+                            <p:stCondLst>
+                              <p:cond delay="0"/>
+                            </p:stCondLst>
+                            <p:childTnLst>
+                              <p:par>
+                                <p:cTn id="37" presetID="1" presetClass="entr" presetSubtype="0" fill="hold" grpId="0" nodeType="clickEffect">
+                                  <p:stCondLst>
+                                    <p:cond delay="0"/>
+                                  </p:stCondLst>
+                                  <p:childTnLst>
+                                    <p:set>
+                                      <p:cBhvr>
+                                        <p:cTn id="38" dur="1" fill="hold">
+                                          <p:stCondLst>
+                                            <p:cond delay="0"/>
+                                          </p:stCondLst>
+                                        </p:cTn>
+                                        <p:tgtEl>
+                                          <p:spTgt spid="18"/>
+                                        </p:tgtEl>
+                                        <p:attrNameLst>
+                                          <p:attrName>style.visibility</p:attrName>
+                                        </p:attrNameLst>
+                                      </p:cBhvr>
+                                      <p:to>
+                                        <p:strVal val="visible"/>
+                                      </p:to>
+                                    </p:set>
+                                  </p:childTnLst>
+                                </p:cTn>
+                              </p:par>
+                            </p:childTnLst>
+                          </p:cTn>
+                        </p:par>
+                      </p:childTnLst>
+                    </p:cTn>
+                  </p:par>
+                  <p:par>
+                    <p:cTn id="44" fill="hold">
+                      <p:stCondLst>
+                        <p:cond delay="indefinite"/>
+                      </p:stCondLst>
+                      <p:childTnLst>
+                        <p:par>
+                          <p:cTn id="43" fill="hold">
+                            <p:stCondLst>
+                              <p:cond delay="0"/>
+                            </p:stCondLst>
+                            <p:childTnLst>
+                              <p:par>
+                                <p:cTn id="41" presetID="1" presetClass="entr" presetSubtype="0" fill="hold" grpId="0" nodeType="clickEffect">
+                                  <p:stCondLst>
+                                    <p:cond delay="0"/>
+                                  </p:stCondLst>
+                                  <p:childTnLst>
+                                    <p:set>
+                                      <p:cBhvr>
+                                        <p:cTn id="42" dur="1" fill="hold">
+                                          <p:stCondLst>
+                                            <p:cond delay="0"/>
+                                          </p:stCondLst>
+                                        </p:cTn>
+                                        <p:tgtEl>
+                                          <p:spTgt spid="19"/>
+                                        </p:tgtEl>
+                                        <p:attrNameLst>
+                                          <p:attrName>style.visibility</p:attrName>
+                                        </p:attrNameLst>
+                                      </p:cBhvr>
+                                      <p:to>
+                                        <p:strVal val="visible"/>
+                                      </p:to>
+                                    </p:set>
+                                  </p:childTnLst>
+                                </p:cTn>
+                              </p:par>
+                            </p:childTnLst>
+                          </p:cTn>
+                        </p:par>
+                      </p:childTnLst>
+                    </p:cTn>
+                  </p:par>
+                  <p:par>
+                    <p:cTn id="48" fill="hold">
+                      <p:stCondLst>
+                        <p:cond delay="indefinite"/>
+                      </p:stCondLst>
+                      <p:childTnLst>
+                        <p:par>
+                          <p:cTn id="47" fill="hold">
+                            <p:stCondLst>
+                              <p:cond delay="0"/>
+                            </p:stCondLst>
+                            <p:childTnLst>
+                              <p:par>
+                                <p:cTn id="45" presetID="1" presetClass="entr" presetSubtype="0" fill="hold" grpId="0" nodeType="clickEffect">
+                                  <p:stCondLst>
+                                    <p:cond delay="0"/>
+                                  </p:stCondLst>
+                                  <p:childTnLst>
+                                    <p:set>
+                                      <p:cBhvr>
+                                        <p:cTn id="46" dur="1" fill="hold">
+                                          <p:stCondLst>
+                                            <p:cond delay="0"/>
+                                          </p:stCondLst>
+                                        </p:cTn>
+                                        <p:tgtEl>
+                                          <p:spTgt spid="20"/>
+                                        </p:tgtEl>
+                                        <p:attrNameLst>
+                                          <p:attrName>style.visibility</p:attrName>
+                                        </p:attrNameLst>
+                                      </p:cBhvr>
+                                      <p:to>
+                                        <p:strVal val="visible"/>
+                                      </p:to>
+                                    </p:set>
+                                  </p:childTnLst>
+                                </p:cTn>
+                              </p:par>
+                            </p:childTnLst>
+                          </p:cTn>
+                        </p:par>
+                      </p:childTnLst>
+                    </p:cTn>
+                  </p:par>
+                </p:childTnLst>
+              </p:cTn>
+              <p:prevCondLst>
+                <p:cond evt="onPrev" delay="0">
+                  <p:tgtEl>
+                    <p:sldTgt/>
+                  </p:tgtEl>
+                </p:cond>
+              </p:prevCondLst>
+              <p:nextCondLst>
+                <p:cond evt="onNext" delay="0">
+                  <p:tgtEl>
+                    <p:sldTgt/>
+                  </p:tgtEl>
+                </p:cond>
+              </p:nextCondLst>
+            </p:seq>
+          </p:childTnLst>
+        </p:cTn>
+      </p:par>
+    </p:tnLst>
+    <p:bldLst>
+      <p:bldP spid="10" grpId="0"/>
+      <p:bldP spid="8" grpId="0"/>
+      <p:bldP spid="9" grpId="0"/>
+      <p:bldP spid="11" grpId="0"/>
+      <p:bldP spid="12" grpId="0"/>
+      <p:bldP spid="13" grpId="0"/>
+      <p:bldP spid="14" grpId="0"/>
+      <p:bldP spid="15" grpId="0"/>
+      <p:bldP spid="16" grpId="0"/>
+      <p:bldP spid="17" grpId="0"/>
+      <p:bldP spid="18" grpId="0"/>
+      <p:bldP spid="19" grpId="0"/>
+      <p:bldP spid="20" grpId="0"/>
+    </p:bldLst>
+  </p:timing>
+</p:sld>
+</file>
+
+<file path=ppt/slides/slide4.xml><?xml version="1.0" encoding="utf-8"?>
+<p:sld xmlns:a="http://schemas.openxmlformats.org/drawingml/2006/main" xmlns:p="http://schemas.openxmlformats.org/presentationml/2006/main" xmlns:r="http://schemas.openxmlformats.org/officeDocument/2006/relationships">
+  <p:cSld>
+    <p:spTree>
+      <p:nvGrpSpPr>
+        <p:cNvPr id="1" name=""/>
+        <p:cNvGrpSpPr/>
+        <p:nvPr/>
+      </p:nvGrpSpPr>
+      <p:grpSpPr/>
+      <p:sp>
+        <p:nvSpPr>
+          <p:cNvPr id="2" name="TextBox 1"/>
+          <p:cNvSpPr txBox="1"/>
+          <p:nvPr/>
+        </p:nvSpPr>
+        <p:spPr>
+          <a:xfrm>
+            <a:off x="8625535" y="201168"/>
+            <a:ext cx="3291840" cy="365760"/>
+          </a:xfrm>
+          <a:prstGeom prst="rect">
+            <a:avLst/>
+          </a:prstGeom>
+          <a:noFill/>
+        </p:spPr>
+        <p:txBody>
+          <a:bodyPr wrap="square" lIns="0" rIns="0" tIns="0" bIns="0">
+            <a:spAutoFit/>
+          </a:bodyPr>
+          <a:lstStyle/>
+          <a:p>
+            <a:pPr algn="r"/>
+            <a:r>
+              <a:rPr sz="1800" b="0">
+                <a:solidFill>
+                  <a:srgbClr val="1A1A18"/>
+                </a:solidFill>
+                <a:latin typeface="DM Serif Display"/>
+              </a:rPr>
+              <a:t>afgeleide</a:t>
+            </a:r>
+            <a:r>
+              <a:rPr sz="1800" b="0">
+                <a:solidFill>
+                  <a:srgbClr val="2D6A4F"/>
+                </a:solidFill>
+                <a:latin typeface="DM Serif Display"/>
+              </a:rPr>
+              <a:t>oefenen</a:t>
+            </a:r>
+            <a:r>
+              <a:rPr sz="1800" b="0">
+                <a:solidFill>
+                  <a:srgbClr val="1A1A18"/>
+                </a:solidFill>
+                <a:latin typeface="DM Serif Display"/>
+              </a:rPr>
+              <a:t>.nl</a:t>
+            </a:r>
+          </a:p>
+        </p:txBody>
+      </p:sp>
+      <p:pic>
+        <p:nvPicPr>
+          <p:cNvPr id="3" name="Picture 2" descr="aaf-point.png"/>
+          <p:cNvPicPr>
+            <a:picLocks noChangeAspect="1"/>
+          </p:cNvPicPr>
+          <p:nvPr/>
+        </p:nvPicPr>
+        <p:blipFill>
+          <a:blip r:embed="rId2"/>
+          <a:stretch>
+            <a:fillRect/>
+          </a:stretch>
+        </p:blipFill>
+        <p:spPr>
+          <a:xfrm>
+            <a:off x="10235895" y="4526280"/>
+            <a:ext cx="1635760" cy="2103120"/>
+          </a:xfrm>
+          <a:prstGeom prst="rect">
+            <a:avLst/>
+          </a:prstGeom>
+        </p:spPr>
+      </p:pic>
+      <p:sp>
+        <p:nvSpPr>
+          <p:cNvPr id="4" name="TextBox 3"/>
+          <p:cNvSpPr txBox="1"/>
+          <p:nvPr/>
+        </p:nvSpPr>
+        <p:spPr>
+          <a:xfrm>
+            <a:off x="914400" y="228600"/>
+            <a:ext cx="9144000" cy="640080"/>
+          </a:xfrm>
+          <a:prstGeom prst="rect">
+            <a:avLst/>
+          </a:prstGeom>
+          <a:noFill/>
+        </p:spPr>
+        <p:txBody>
+          <a:bodyPr wrap="square" lIns="0" rIns="0" tIns="0" bIns="0">
+            <a:spAutoFit/>
+          </a:bodyPr>
+          <a:lstStyle/>
+          <a:p>
+            <a:pPr algn="ctr"/>
+            <a:r>
+              <a:rPr sz="3200" b="1">
+                <a:solidFill>
+                  <a:srgbClr val="1A1A18"/>
+                </a:solidFill>
+                <a:latin typeface="DM Serif Display"/>
+              </a:rPr>
+              <a:t>De </a:t>
+            </a:r>
+            <a:r>
+              <a:rPr sz="3200" b="1">
+                <a:solidFill>
+                  <a:srgbClr val="C94F4A"/>
+                </a:solidFill>
+                <a:latin typeface="DM Serif Display"/>
+              </a:rPr>
+              <a:t>productregel</a:t>
+            </a:r>
+          </a:p>
+        </p:txBody>
+      </p:sp>
+      <p:sp>
+        <p:nvSpPr>
+          <p:cNvPr id="5" name="Rounded Rectangle 4"/>
+          <p:cNvSpPr/>
+          <p:nvPr/>
+        </p:nvSpPr>
+        <p:spPr>
+          <a:xfrm>
+            <a:off x="1280160" y="868680"/>
+            <a:ext cx="8412480" cy="777240"/>
+          </a:xfrm>
+          <a:prstGeom prst="roundRect">
+            <a:avLst>
+              <a:gd name="adj" fmla="val 12000"/>
+            </a:avLst>
+          </a:prstGeom>
+          <a:solidFill>
+            <a:srgbClr val="E8F5EE"/>
+          </a:solidFill>
+          <a:ln>
+            <a:noFill/>
+          </a:ln>
+          <a:effectLst/>
+        </p:spPr>
+        <p:style>
+          <a:lnRef idx="1">
+            <a:schemeClr val="accent1"/>
+          </a:lnRef>
+          <a:fillRef idx="3">
+            <a:schemeClr val="accent1"/>
+          </a:fillRef>
+          <a:effectRef idx="2">
+            <a:schemeClr val="accent1"/>
+          </a:effectRef>
+          <a:fontRef idx="minor">
+            <a:schemeClr val="lt1"/>
+          </a:fontRef>
+        </p:style>
+        <p:txBody>
+          <a:bodyPr rtlCol="0" anchor="ctr"/>
+          <a:lstStyle/>
+          <a:p>
+            <a:pPr algn="ctr"/>
+          </a:p>
+        </p:txBody>
+      </p:sp>
+      <p:pic>
+        <p:nvPicPr>
+          <p:cNvPr id="6" name="Picture 5" descr="regel-product.png"/>
+          <p:cNvPicPr>
+            <a:picLocks noChangeAspect="1"/>
+          </p:cNvPicPr>
+          <p:nvPr/>
+        </p:nvPicPr>
+        <p:blipFill>
+          <a:blip r:embed="rId3"/>
+          <a:stretch>
+            <a:fillRect/>
+          </a:stretch>
+        </p:blipFill>
+        <p:spPr>
+          <a:xfrm>
+            <a:off x="1737360" y="1051560"/>
+            <a:ext cx="7498080" cy="344513"/>
+          </a:xfrm>
+          <a:prstGeom prst="rect">
+            <a:avLst/>
+          </a:prstGeom>
+        </p:spPr>
+      </p:pic>
+      <p:sp>
+        <p:nvSpPr>
+          <p:cNvPr id="7" name="TextBox 6"/>
+          <p:cNvSpPr txBox="1"/>
+          <p:nvPr/>
+        </p:nvSpPr>
+        <p:spPr>
+          <a:xfrm>
+            <a:off x="914400" y="1874519"/>
+            <a:ext cx="9144000" cy="310896"/>
+          </a:xfrm>
+          <a:prstGeom prst="rect">
+            <a:avLst/>
+          </a:prstGeom>
+          <a:noFill/>
+        </p:spPr>
+        <p:txBody>
+          <a:bodyPr wrap="square" lIns="0" rIns="0" tIns="0" bIns="0">
+            <a:spAutoFit/>
+          </a:bodyPr>
+          <a:lstStyle/>
+          <a:p>
+            <a:pPr algn="ctr"/>
+            <a:r>
+              <a:rPr sz="1200" b="0">
+                <a:solidFill>
+                  <a:srgbClr val="7A7870"/>
+                </a:solidFill>
+                <a:latin typeface="DM Sans"/>
+              </a:rPr>
+              <a:t>de functie van de vorige pagina noemen we hier f</a:t>
+            </a:r>
+          </a:p>
+        </p:txBody>
+      </p:sp>
+      <p:pic>
+        <p:nvPicPr>
+          <p:cNvPr id="8" name="Picture 7" descr="prod-f-def.png"/>
+          <p:cNvPicPr>
+            <a:picLocks noChangeAspect="1"/>
+          </p:cNvPicPr>
+          <p:nvPr/>
+        </p:nvPicPr>
+        <p:blipFill>
+          <a:blip r:embed="rId4"/>
+          <a:stretch>
+            <a:fillRect/>
+          </a:stretch>
+        </p:blipFill>
+        <p:spPr>
+          <a:xfrm>
+            <a:off x="3108960" y="2194560"/>
+            <a:ext cx="4754880" cy="450937"/>
+          </a:xfrm>
+          <a:prstGeom prst="rect">
+            <a:avLst/>
+          </a:prstGeom>
+        </p:spPr>
+      </p:pic>
+      <p:sp>
+        <p:nvSpPr>
+          <p:cNvPr id="9" name="Rounded Rectangle 8"/>
+          <p:cNvSpPr/>
+          <p:nvPr/>
+        </p:nvSpPr>
+        <p:spPr>
+          <a:xfrm>
+            <a:off x="685800" y="2926080"/>
+            <a:ext cx="2651760" cy="384048"/>
+          </a:xfrm>
+          <a:prstGeom prst="roundRect">
+            <a:avLst>
+              <a:gd name="adj" fmla="val 50000"/>
+            </a:avLst>
+          </a:prstGeom>
+          <a:solidFill>
+            <a:srgbClr val="2D6A4F"/>
+          </a:solidFill>
+          <a:ln>
+            <a:noFill/>
+          </a:ln>
+          <a:effectLst/>
+        </p:spPr>
+        <p:style>
+          <a:lnRef idx="1">
+            <a:schemeClr val="accent1"/>
+          </a:lnRef>
+          <a:fillRef idx="3">
+            <a:schemeClr val="accent1"/>
+          </a:fillRef>
+          <a:effectRef idx="2">
+            <a:schemeClr val="accent1"/>
+          </a:effectRef>
+          <a:fontRef idx="minor">
+            <a:schemeClr val="lt1"/>
+          </a:fontRef>
+        </p:style>
+        <p:txBody>
+          <a:bodyPr rtlCol="0" anchor="ctr" lIns="76200" rIns="76200"/>
+          <a:lstStyle/>
+          <a:p>
+            <a:pPr algn="ctr"/>
+            <a:r>
+              <a:rPr sz="1300" b="1">
+                <a:solidFill>
+                  <a:srgbClr val="FFFFFF"/>
+                </a:solidFill>
+                <a:latin typeface="DM Sans"/>
+              </a:rPr>
+              <a:t>Stap 1 · kies g en h</a:t>
+            </a:r>
+          </a:p>
+        </p:txBody>
+      </p:sp>
+      <p:pic>
+        <p:nvPicPr>
+          <p:cNvPr id="10" name="Picture 9" descr="g-def.png"/>
+          <p:cNvPicPr>
+            <a:picLocks noChangeAspect="1"/>
+          </p:cNvPicPr>
+          <p:nvPr/>
+        </p:nvPicPr>
+        <p:blipFill>
+          <a:blip r:embed="rId5"/>
+          <a:stretch>
+            <a:fillRect/>
+          </a:stretch>
+        </p:blipFill>
+        <p:spPr>
+          <a:xfrm>
+            <a:off x="3703320" y="2880360"/>
+            <a:ext cx="1920240" cy="340822"/>
+          </a:xfrm>
+          <a:prstGeom prst="rect">
+            <a:avLst/>
+          </a:prstGeom>
+        </p:spPr>
+      </p:pic>
+      <p:pic>
+        <p:nvPicPr>
+          <p:cNvPr id="11" name="Picture 10" descr="h-def.png"/>
+          <p:cNvPicPr>
+            <a:picLocks noChangeAspect="1"/>
+          </p:cNvPicPr>
+          <p:nvPr/>
+        </p:nvPicPr>
+        <p:blipFill>
+          <a:blip r:embed="rId6"/>
+          <a:stretch>
+            <a:fillRect/>
+          </a:stretch>
+        </p:blipFill>
+        <p:spPr>
+          <a:xfrm>
+            <a:off x="6263640" y="2880360"/>
+            <a:ext cx="1920240" cy="336665"/>
+          </a:xfrm>
+          <a:prstGeom prst="rect">
+            <a:avLst/>
+          </a:prstGeom>
+        </p:spPr>
+      </p:pic>
+      <p:sp>
+        <p:nvSpPr>
+          <p:cNvPr id="12" name="Rounded Rectangle 11"/>
+          <p:cNvSpPr/>
+          <p:nvPr/>
+        </p:nvSpPr>
+        <p:spPr>
+          <a:xfrm>
+            <a:off x="685800" y="3520440"/>
+            <a:ext cx="2651760" cy="384048"/>
+          </a:xfrm>
+          <a:prstGeom prst="roundRect">
+            <a:avLst>
+              <a:gd name="adj" fmla="val 50000"/>
+            </a:avLst>
+          </a:prstGeom>
+          <a:solidFill>
+            <a:srgbClr val="2D6A4F"/>
+          </a:solidFill>
+          <a:ln>
+            <a:noFill/>
+          </a:ln>
+          <a:effectLst/>
+        </p:spPr>
+        <p:style>
+          <a:lnRef idx="1">
+            <a:schemeClr val="accent1"/>
+          </a:lnRef>
+          <a:fillRef idx="3">
+            <a:schemeClr val="accent1"/>
+          </a:fillRef>
+          <a:effectRef idx="2">
+            <a:schemeClr val="accent1"/>
+          </a:effectRef>
+          <a:fontRef idx="minor">
+            <a:schemeClr val="lt1"/>
+          </a:fontRef>
+        </p:style>
+        <p:txBody>
+          <a:bodyPr rtlCol="0" anchor="ctr" lIns="76200" rIns="76200"/>
+          <a:lstStyle/>
+          <a:p>
+            <a:pPr algn="ctr"/>
+            <a:r>
+              <a:rPr sz="1300" b="1">
+                <a:solidFill>
+                  <a:srgbClr val="FFFFFF"/>
+                </a:solidFill>
+                <a:latin typeface="DM Sans"/>
+              </a:rPr>
+              <a:t>Stap 2 · bereken g′ en h′</a:t>
+            </a:r>
+          </a:p>
+        </p:txBody>
+      </p:sp>
+      <p:pic>
+        <p:nvPicPr>
+          <p:cNvPr id="13" name="Picture 12" descr="g-afgeleide.png"/>
+          <p:cNvPicPr>
+            <a:picLocks noChangeAspect="1"/>
+          </p:cNvPicPr>
+          <p:nvPr/>
+        </p:nvPicPr>
+        <p:blipFill>
+          <a:blip r:embed="rId7"/>
+          <a:stretch>
+            <a:fillRect/>
+          </a:stretch>
+        </p:blipFill>
+        <p:spPr>
+          <a:xfrm>
+            <a:off x="3931920" y="3474720"/>
+            <a:ext cx="1463040" cy="333123"/>
+          </a:xfrm>
+          <a:prstGeom prst="rect">
+            <a:avLst/>
+          </a:prstGeom>
+        </p:spPr>
+      </p:pic>
+      <p:pic>
+        <p:nvPicPr>
+          <p:cNvPr id="14" name="Picture 13" descr="h-afgeleide.png"/>
+          <p:cNvPicPr>
+            <a:picLocks noChangeAspect="1"/>
+          </p:cNvPicPr>
+          <p:nvPr/>
+        </p:nvPicPr>
+        <p:blipFill>
+          <a:blip r:embed="rId8"/>
+          <a:stretch>
+            <a:fillRect/>
+          </a:stretch>
+        </p:blipFill>
+        <p:spPr>
+          <a:xfrm>
+            <a:off x="6217920" y="3474720"/>
+            <a:ext cx="1463040" cy="326113"/>
+          </a:xfrm>
+          <a:prstGeom prst="rect">
+            <a:avLst/>
+          </a:prstGeom>
+        </p:spPr>
+      </p:pic>
+      <p:sp>
+        <p:nvSpPr>
+          <p:cNvPr id="15" name="Rounded Rectangle 14"/>
+          <p:cNvSpPr/>
+          <p:nvPr/>
+        </p:nvSpPr>
+        <p:spPr>
+          <a:xfrm>
+            <a:off x="685800" y="4114800"/>
+            <a:ext cx="2651760" cy="384048"/>
+          </a:xfrm>
+          <a:prstGeom prst="roundRect">
+            <a:avLst>
+              <a:gd name="adj" fmla="val 50000"/>
+            </a:avLst>
+          </a:prstGeom>
+          <a:solidFill>
+            <a:srgbClr val="2D6A4F"/>
+          </a:solidFill>
+          <a:ln>
+            <a:noFill/>
+          </a:ln>
+          <a:effectLst/>
+        </p:spPr>
+        <p:style>
+          <a:lnRef idx="1">
+            <a:schemeClr val="accent1"/>
+          </a:lnRef>
+          <a:fillRef idx="3">
+            <a:schemeClr val="accent1"/>
+          </a:fillRef>
+          <a:effectRef idx="2">
+            <a:schemeClr val="accent1"/>
+          </a:effectRef>
+          <a:fontRef idx="minor">
+            <a:schemeClr val="lt1"/>
+          </a:fontRef>
+        </p:style>
+        <p:txBody>
+          <a:bodyPr rtlCol="0" anchor="ctr" lIns="76200" rIns="76200"/>
+          <a:lstStyle/>
+          <a:p>
+            <a:pPr algn="ctr"/>
+            <a:r>
+              <a:rPr sz="1300" b="1">
+                <a:solidFill>
+                  <a:srgbClr val="FFFFFF"/>
+                </a:solidFill>
+                <a:latin typeface="DM Sans"/>
+              </a:rPr>
+              <a:t>Stap 3 · vul de formule in</a:t>
+            </a:r>
+          </a:p>
+        </p:txBody>
+      </p:sp>
+      <p:pic>
+        <p:nvPicPr>
+          <p:cNvPr id="16" name="Picture 15" descr="stap3-symbolisch.png"/>
+          <p:cNvPicPr>
+            <a:picLocks noChangeAspect="1"/>
+          </p:cNvPicPr>
+          <p:nvPr/>
+        </p:nvPicPr>
+        <p:blipFill>
+          <a:blip r:embed="rId9"/>
+          <a:stretch>
+            <a:fillRect/>
+          </a:stretch>
+        </p:blipFill>
+        <p:spPr>
+          <a:xfrm>
+            <a:off x="4480560" y="4069080"/>
+            <a:ext cx="4572000" cy="341573"/>
+          </a:xfrm>
+          <a:prstGeom prst="rect">
+            <a:avLst/>
+          </a:prstGeom>
+        </p:spPr>
+      </p:pic>
+      <p:pic>
+        <p:nvPicPr>
+          <p:cNvPr id="17" name="Picture 16" descr="stap3-ingevuld.png"/>
+          <p:cNvPicPr>
+            <a:picLocks noChangeAspect="1"/>
+          </p:cNvPicPr>
+          <p:nvPr/>
+        </p:nvPicPr>
+        <p:blipFill>
+          <a:blip r:embed="rId10"/>
+          <a:stretch>
+            <a:fillRect/>
+          </a:stretch>
+        </p:blipFill>
+        <p:spPr>
+          <a:xfrm>
+            <a:off x="4206240" y="4617720"/>
+            <a:ext cx="5120640" cy="355722"/>
+          </a:xfrm>
+          <a:prstGeom prst="rect">
+            <a:avLst/>
+          </a:prstGeom>
+        </p:spPr>
+      </p:pic>
+      <p:pic>
+        <p:nvPicPr>
+          <p:cNvPr id="18" name="Picture 17" descr="stap3-samen.png"/>
+          <p:cNvPicPr>
+            <a:picLocks noChangeAspect="1"/>
+          </p:cNvPicPr>
+          <p:nvPr/>
+        </p:nvPicPr>
+        <p:blipFill>
+          <a:blip r:embed="rId11"/>
+          <a:stretch>
+            <a:fillRect/>
+          </a:stretch>
+        </p:blipFill>
+        <p:spPr>
+          <a:xfrm>
+            <a:off x="5212080" y="5166360"/>
+            <a:ext cx="3108960" cy="356189"/>
+          </a:xfrm>
+          <a:prstGeom prst="rect">
+            <a:avLst/>
+          </a:prstGeom>
+        </p:spPr>
+      </p:pic>
+      <p:pic>
+        <p:nvPicPr>
+          <p:cNvPr id="19" name="Picture 18" descr="prod-antwoord.png"/>
+          <p:cNvPicPr>
+            <a:picLocks noChangeAspect="1"/>
+          </p:cNvPicPr>
+          <p:nvPr/>
+        </p:nvPicPr>
+        <p:blipFill>
+          <a:blip r:embed="rId12"/>
+          <a:stretch>
+            <a:fillRect/>
+          </a:stretch>
+        </p:blipFill>
+        <p:spPr>
+          <a:xfrm>
+            <a:off x="5120640" y="5715000"/>
+            <a:ext cx="3291840" cy="395947"/>
+          </a:xfrm>
+          <a:prstGeom prst="rect">
+            <a:avLst/>
+          </a:prstGeom>
+        </p:spPr>
+      </p:pic>
+    </p:spTree>
+  </p:cSld>
+  <p:clrMapOvr>
+    <a:masterClrMapping/>
+  </p:clrMapOvr>
+  <p:timing>
+    <p:tnLst>
+      <p:par>
+        <p:cTn id="1" dur="indefinite" restart="never" nodeType="tmRoot">
+          <p:childTnLst>
+            <p:seq concurrent="1" nextAc="seek">
+              <p:cTn id="2" dur="indefinite" nodeType="mainSeq">
+                <p:childTnLst>
+                  <p:par>
+                    <p:cTn id="6" fill="hold">
+                      <p:stCondLst>
+                        <p:cond delay="indefinite"/>
+                      </p:stCondLst>
+                      <p:childTnLst>
+                        <p:par>
+                          <p:cTn id="5" fill="hold">
+                            <p:stCondLst>
+                              <p:cond delay="0"/>
+                            </p:stCondLst>
+                            <p:childTnLst>
+                              <p:par>
+                                <p:cTn id="3" presetID="1" presetClass="entr" presetSubtype="0" fill="hold" grpId="0" nodeType="clickEffect">
+                                  <p:stCondLst>
+                                    <p:cond delay="0"/>
+                                  </p:stCondLst>
+                                  <p:childTnLst>
+                                    <p:set>
+                                      <p:cBhvr>
+                                        <p:cTn id="4" dur="1" fill="hold">
+                                          <p:stCondLst>
+                                            <p:cond delay="0"/>
+                                          </p:stCondLst>
+                                        </p:cTn>
+                                        <p:tgtEl>
+                                          <p:spTgt spid="7"/>
+                                        </p:tgtEl>
+                                        <p:attrNameLst>
+                                          <p:attrName>style.visibility</p:attrName>
+                                        </p:attrNameLst>
+                                      </p:cBhvr>
+                                      <p:to>
+                                        <p:strVal val="visible"/>
+                                      </p:to>
+                                    </p:set>
+                                  </p:childTnLst>
+                                </p:cTn>
+                              </p:par>
+                            </p:childTnLst>
+                          </p:cTn>
+                        </p:par>
+                      </p:childTnLst>
+                    </p:cTn>
+                  </p:par>
+                  <p:par>
+                    <p:cTn id="10" fill="hold">
+                      <p:stCondLst>
+                        <p:cond delay="indefinite"/>
+                      </p:stCondLst>
+                      <p:childTnLst>
+                        <p:par>
+                          <p:cTn id="9" fill="hold">
+                            <p:stCondLst>
+                              <p:cond delay="0"/>
+                            </p:stCondLst>
+                            <p:childTnLst>
+                              <p:par>
+                                <p:cTn id="7" presetID="1" presetClass="entr" presetSubtype="0" fill="hold" grpId="0" nodeType="clickEffect">
+                                  <p:stCondLst>
+                                    <p:cond delay="0"/>
+                                  </p:stCondLst>
+                                  <p:childTnLst>
+                                    <p:set>
+                                      <p:cBhvr>
+                                        <p:cTn id="8" dur="1" fill="hold">
+                                          <p:stCondLst>
+                                            <p:cond delay="0"/>
+                                          </p:stCondLst>
+                                        </p:cTn>
+                                        <p:tgtEl>
+                                          <p:spTgt spid="8"/>
+                                        </p:tgtEl>
+                                        <p:attrNameLst>
+                                          <p:attrName>style.visibility</p:attrName>
+                                        </p:attrNameLst>
+                                      </p:cBhvr>
+                                      <p:to>
+                                        <p:strVal val="visible"/>
+                                      </p:to>
+                                    </p:set>
+                                  </p:childTnLst>
+                                </p:cTn>
+                              </p:par>
+                            </p:childTnLst>
+                          </p:cTn>
+                        </p:par>
+                      </p:childTnLst>
+                    </p:cTn>
+                  </p:par>
+                  <p:par>
+                    <p:cTn id="14" fill="hold">
+                      <p:stCondLst>
+                        <p:cond delay="indefinite"/>
+                      </p:stCondLst>
+                      <p:childTnLst>
+                        <p:par>
+                          <p:cTn id="13" fill="hold">
+                            <p:stCondLst>
+                              <p:cond delay="0"/>
+                            </p:stCondLst>
+                            <p:childTnLst>
+                              <p:par>
+                                <p:cTn id="11" presetID="1" presetClass="entr" presetSubtype="0" fill="hold" grpId="0" nodeType="clickEffect">
+                                  <p:stCondLst>
+                                    <p:cond delay="0"/>
+                                  </p:stCondLst>
+                                  <p:childTnLst>
+                                    <p:set>
+                                      <p:cBhvr>
+                                        <p:cTn id="12" dur="1" fill="hold">
+                                          <p:stCondLst>
+                                            <p:cond delay="0"/>
+                                          </p:stCondLst>
+                                        </p:cTn>
+                                        <p:tgtEl>
+                                          <p:spTgt spid="9"/>
+                                        </p:tgtEl>
+                                        <p:attrNameLst>
+                                          <p:attrName>style.visibility</p:attrName>
+                                        </p:attrNameLst>
+                                      </p:cBhvr>
+                                      <p:to>
+                                        <p:strVal val="visible"/>
+                                      </p:to>
+                                    </p:set>
+                                  </p:childTnLst>
+                                </p:cTn>
+                              </p:par>
+                            </p:childTnLst>
+                          </p:cTn>
+                        </p:par>
+                      </p:childTnLst>
+                    </p:cTn>
+                  </p:par>
+                  <p:par>
+                    <p:cTn id="20" fill="hold">
+                      <p:stCondLst>
+                        <p:cond delay="indefinite"/>
+                      </p:stCondLst>
+                      <p:childTnLst>
+                        <p:par>
+                          <p:cTn id="19" fill="hold">
+                            <p:stCondLst>
+                              <p:cond delay="0"/>
+                            </p:stCondLst>
+                            <p:childTnLst>
+                              <p:par>
+                                <p:cTn id="15" presetID="1" presetClass="entr" presetSubtype="0" fill="hold" grpId="0" nodeType="clickEffect">
+                                  <p:stCondLst>
+                                    <p:cond delay="0"/>
+                                  </p:stCondLst>
+                                  <p:childTnLst>
+                                    <p:set>
+                                      <p:cBhvr>
+                                        <p:cTn id="16" dur="1" fill="hold">
+                                          <p:stCondLst>
+                                            <p:cond delay="0"/>
+                                          </p:stCondLst>
+                                        </p:cTn>
+                                        <p:tgtEl>
+                                          <p:spTgt spid="10"/>
+                                        </p:tgtEl>
+                                        <p:attrNameLst>
+                                          <p:attrName>style.visibility</p:attrName>
+                                        </p:attrNameLst>
+                                      </p:cBhvr>
+                                      <p:to>
+                                        <p:strVal val="visible"/>
+                                      </p:to>
+                                    </p:set>
+                                  </p:childTnLst>
+                                </p:cTn>
+                              </p:par>
+                              <p:par>
+                                <p:cTn id="17" presetID="1" presetClass="entr" presetSubtype="0" fill="hold" grpId="0" nodeType="withEffect">
+                                  <p:stCondLst>
+                                    <p:cond delay="0"/>
+                                  </p:stCondLst>
+                                  <p:childTnLst>
+                                    <p:set>
+                                      <p:cBhvr>
+                                        <p:cTn id="18" dur="1" fill="hold">
+                                          <p:stCondLst>
+                                            <p:cond delay="0"/>
+                                          </p:stCondLst>
+                                        </p:cTn>
+                                        <p:tgtEl>
+                                          <p:spTgt spid="11"/>
+                                        </p:tgtEl>
+                                        <p:attrNameLst>
+                                          <p:attrName>style.visibility</p:attrName>
+                                        </p:attrNameLst>
+                                      </p:cBhvr>
+                                      <p:to>
+                                        <p:strVal val="visible"/>
+                                      </p:to>
+                                    </p:set>
+                                  </p:childTnLst>
+                                </p:cTn>
+                              </p:par>
+                            </p:childTnLst>
+                          </p:cTn>
+                        </p:par>
+                      </p:childTnLst>
+                    </p:cTn>
+                  </p:par>
+                  <p:par>
+                    <p:cTn id="24" fill="hold">
+                      <p:stCondLst>
+                        <p:cond delay="indefinite"/>
+                      </p:stCondLst>
+                      <p:childTnLst>
+                        <p:par>
+                          <p:cTn id="23" fill="hold">
+                            <p:stCondLst>
+                              <p:cond delay="0"/>
+                            </p:stCondLst>
+                            <p:childTnLst>
+                              <p:par>
+                                <p:cTn id="21" presetID="1" presetClass="entr" presetSubtype="0" fill="hold" grpId="0" nodeType="clickEffect">
+                                  <p:stCondLst>
+                                    <p:cond delay="0"/>
+                                  </p:stCondLst>
+                                  <p:childTnLst>
+                                    <p:set>
+                                      <p:cBhvr>
+                                        <p:cTn id="22" dur="1" fill="hold">
+                                          <p:stCondLst>
+                                            <p:cond delay="0"/>
+                                          </p:stCondLst>
+                                        </p:cTn>
+                                        <p:tgtEl>
+                                          <p:spTgt spid="12"/>
+                                        </p:tgtEl>
+                                        <p:attrNameLst>
+                                          <p:attrName>style.visibility</p:attrName>
+                                        </p:attrNameLst>
+                                      </p:cBhvr>
+                                      <p:to>
+                                        <p:strVal val="visible"/>
+                                      </p:to>
+                                    </p:set>
+                                  </p:childTnLst>
+                                </p:cTn>
+                              </p:par>
+                            </p:childTnLst>
+                          </p:cTn>
+                        </p:par>
+                      </p:childTnLst>
+                    </p:cTn>
+                  </p:par>
+                  <p:par>
+                    <p:cTn id="30" fill="hold">
+                      <p:stCondLst>
+                        <p:cond delay="indefinite"/>
+                      </p:stCondLst>
+                      <p:childTnLst>
+                        <p:par>
+                          <p:cTn id="29" fill="hold">
+                            <p:stCondLst>
+                              <p:cond delay="0"/>
+                            </p:stCondLst>
+                            <p:childTnLst>
+                              <p:par>
+                                <p:cTn id="25" presetID="1" presetClass="entr" presetSubtype="0" fill="hold" grpId="0" nodeType="clickEffect">
+                                  <p:stCondLst>
+                                    <p:cond delay="0"/>
+                                  </p:stCondLst>
+                                  <p:childTnLst>
+                                    <p:set>
+                                      <p:cBhvr>
+                                        <p:cTn id="26" dur="1" fill="hold">
+                                          <p:stCondLst>
+                                            <p:cond delay="0"/>
+                                          </p:stCondLst>
+                                        </p:cTn>
+                                        <p:tgtEl>
+                                          <p:spTgt spid="13"/>
+                                        </p:tgtEl>
+                                        <p:attrNameLst>
+                                          <p:attrName>style.visibility</p:attrName>
+                                        </p:attrNameLst>
+                                      </p:cBhvr>
+                                      <p:to>
+                                        <p:strVal val="visible"/>
+                                      </p:to>
+                                    </p:set>
+                                  </p:childTnLst>
+                                </p:cTn>
+                              </p:par>
+                              <p:par>
+                                <p:cTn id="27" presetID="1" presetClass="entr" presetSubtype="0" fill="hold" grpId="0" nodeType="withEffect">
+                                  <p:stCondLst>
+                                    <p:cond delay="0"/>
+                                  </p:stCondLst>
+                                  <p:childTnLst>
+                                    <p:set>
+                                      <p:cBhvr>
+                                        <p:cTn id="28" dur="1" fill="hold">
+                                          <p:stCondLst>
+                                            <p:cond delay="0"/>
+                                          </p:stCondLst>
+                                        </p:cTn>
+                                        <p:tgtEl>
+                                          <p:spTgt spid="14"/>
+                                        </p:tgtEl>
+                                        <p:attrNameLst>
+                                          <p:attrName>style.visibility</p:attrName>
+                                        </p:attrNameLst>
+                                      </p:cBhvr>
+                                      <p:to>
+                                        <p:strVal val="visible"/>
+                                      </p:to>
+                                    </p:set>
+                                  </p:childTnLst>
+                                </p:cTn>
+                              </p:par>
+                            </p:childTnLst>
+                          </p:cTn>
+                        </p:par>
+                      </p:childTnLst>
+                    </p:cTn>
+                  </p:par>
+                  <p:par>
+                    <p:cTn id="34" fill="hold">
+                      <p:stCondLst>
+                        <p:cond delay="indefinite"/>
+                      </p:stCondLst>
+                      <p:childTnLst>
+                        <p:par>
+                          <p:cTn id="33" fill="hold">
+                            <p:stCondLst>
+                              <p:cond delay="0"/>
+                            </p:stCondLst>
+                            <p:childTnLst>
+                              <p:par>
+                                <p:cTn id="31" presetID="1" presetClass="entr" presetSubtype="0" fill="hold" grpId="0" nodeType="clickEffect">
+                                  <p:stCondLst>
+                                    <p:cond delay="0"/>
+                                  </p:stCondLst>
+                                  <p:childTnLst>
+                                    <p:set>
+                                      <p:cBhvr>
+                                        <p:cTn id="32" dur="1" fill="hold">
+                                          <p:stCondLst>
+                                            <p:cond delay="0"/>
+                                          </p:stCondLst>
+                                        </p:cTn>
+                                        <p:tgtEl>
+                                          <p:spTgt spid="15"/>
+                                        </p:tgtEl>
+                                        <p:attrNameLst>
+                                          <p:attrName>style.visibility</p:attrName>
+                                        </p:attrNameLst>
+                                      </p:cBhvr>
+                                      <p:to>
+                                        <p:strVal val="visible"/>
+                                      </p:to>
+                                    </p:set>
+                                  </p:childTnLst>
+                                </p:cTn>
+                              </p:par>
+                            </p:childTnLst>
+                          </p:cTn>
+                        </p:par>
+                      </p:childTnLst>
+                    </p:cTn>
+                  </p:par>
+                  <p:par>
+                    <p:cTn id="38" fill="hold">
+                      <p:stCondLst>
+                        <p:cond delay="indefinite"/>
+                      </p:stCondLst>
+                      <p:childTnLst>
+                        <p:par>
+                          <p:cTn id="37" fill="hold">
+                            <p:stCondLst>
+                              <p:cond delay="0"/>
+                            </p:stCondLst>
+                            <p:childTnLst>
+                              <p:par>
+                                <p:cTn id="35" presetID="1" presetClass="entr" presetSubtype="0" fill="hold" grpId="0" nodeType="clickEffect">
+                                  <p:stCondLst>
+                                    <p:cond delay="0"/>
+                                  </p:stCondLst>
+                                  <p:childTnLst>
+                                    <p:set>
+                                      <p:cBhvr>
+                                        <p:cTn id="36" dur="1" fill="hold">
+                                          <p:stCondLst>
+                                            <p:cond delay="0"/>
+                                          </p:stCondLst>
+                                        </p:cTn>
+                                        <p:tgtEl>
+                                          <p:spTgt spid="16"/>
+                                        </p:tgtEl>
+                                        <p:attrNameLst>
+                                          <p:attrName>style.visibility</p:attrName>
+                                        </p:attrNameLst>
+                                      </p:cBhvr>
+                                      <p:to>
+                                        <p:strVal val="visible"/>
+                                      </p:to>
+                                    </p:set>
+                                  </p:childTnLst>
+                                </p:cTn>
+                              </p:par>
+                            </p:childTnLst>
+                          </p:cTn>
+                        </p:par>
+                      </p:childTnLst>
+                    </p:cTn>
+                  </p:par>
+                  <p:par>
+                    <p:cTn id="42" fill="hold">
+                      <p:stCondLst>
+                        <p:cond delay="indefinite"/>
+                      </p:stCondLst>
+                      <p:childTnLst>
+                        <p:par>
+                          <p:cTn id="41" fill="hold">
+                            <p:stCondLst>
+                              <p:cond delay="0"/>
+                            </p:stCondLst>
+                            <p:childTnLst>
+                              <p:par>
+                                <p:cTn id="39" presetID="1" presetClass="entr" presetSubtype="0" fill="hold" grpId="0" nodeType="clickEffect">
+                                  <p:stCondLst>
+                                    <p:cond delay="0"/>
+                                  </p:stCondLst>
+                                  <p:childTnLst>
+                                    <p:set>
+                                      <p:cBhvr>
+                                        <p:cTn id="40" dur="1" fill="hold">
+                                          <p:stCondLst>
+                                            <p:cond delay="0"/>
+                                          </p:stCondLst>
+                                        </p:cTn>
+                                        <p:tgtEl>
+                                          <p:spTgt spid="17"/>
+                                        </p:tgtEl>
+                                        <p:attrNameLst>
+                                          <p:attrName>style.visibility</p:attrName>
+                                        </p:attrNameLst>
+                                      </p:cBhvr>
+                                      <p:to>
+                                        <p:strVal val="visible"/>
+                                      </p:to>
+                                    </p:set>
+                                  </p:childTnLst>
+                                </p:cTn>
+                              </p:par>
+                            </p:childTnLst>
+                          </p:cTn>
+                        </p:par>
+                      </p:childTnLst>
+                    </p:cTn>
+                  </p:par>
+                  <p:par>
+                    <p:cTn id="46" fill="hold">
+                      <p:stCondLst>
+                        <p:cond delay="indefinite"/>
+                      </p:stCondLst>
+                      <p:childTnLst>
+                        <p:par>
+                          <p:cTn id="45" fill="hold">
+                            <p:stCondLst>
+                              <p:cond delay="0"/>
+                            </p:stCondLst>
+                            <p:childTnLst>
+                              <p:par>
+                                <p:cTn id="43" presetID="1" presetClass="entr" presetSubtype="0" fill="hold" grpId="0" nodeType="clickEffect">
+                                  <p:stCondLst>
+                                    <p:cond delay="0"/>
+                                  </p:stCondLst>
+                                  <p:childTnLst>
+                                    <p:set>
+                                      <p:cBhvr>
+                                        <p:cTn id="44" dur="1" fill="hold">
+                                          <p:stCondLst>
+                                            <p:cond delay="0"/>
+                                          </p:stCondLst>
+                                        </p:cTn>
+                                        <p:tgtEl>
+                                          <p:spTgt spid="18"/>
+                                        </p:tgtEl>
+                                        <p:attrNameLst>
+                                          <p:attrName>style.visibility</p:attrName>
+                                        </p:attrNameLst>
+                                      </p:cBhvr>
+                                      <p:to>
+                                        <p:strVal val="visible"/>
+                                      </p:to>
+                                    </p:set>
+                                  </p:childTnLst>
+                                </p:cTn>
+                              </p:par>
+                            </p:childTnLst>
+                          </p:cTn>
+                        </p:par>
+                      </p:childTnLst>
+                    </p:cTn>
+                  </p:par>
+                  <p:par>
+                    <p:cTn id="50" fill="hold">
+                      <p:stCondLst>
+                        <p:cond delay="indefinite"/>
+                      </p:stCondLst>
+                      <p:childTnLst>
+                        <p:par>
+                          <p:cTn id="49" fill="hold">
+                            <p:stCondLst>
+                              <p:cond delay="0"/>
+                            </p:stCondLst>
+                            <p:childTnLst>
+                              <p:par>
+                                <p:cTn id="47" presetID="1" presetClass="entr" presetSubtype="0" fill="hold" grpId="0" nodeType="clickEffect">
+                                  <p:stCondLst>
+                                    <p:cond delay="0"/>
+                                  </p:stCondLst>
+                                  <p:childTnLst>
+                                    <p:set>
+                                      <p:cBhvr>
+                                        <p:cTn id="48" dur="1" fill="hold">
+                                          <p:stCondLst>
+                                            <p:cond delay="0"/>
+                                          </p:stCondLst>
+                                        </p:cTn>
+                                        <p:tgtEl>
+                                          <p:spTgt spid="19"/>
+                                        </p:tgtEl>
+                                        <p:attrNameLst>
+                                          <p:attrName>style.visibility</p:attrName>
+                                        </p:attrNameLst>
+                                      </p:cBhvr>
+                                      <p:to>
+                                        <p:strVal val="visible"/>
+                                      </p:to>
+                                    </p:set>
+                                  </p:childTnLst>
+                                </p:cTn>
+                              </p:par>
+                            </p:childTnLst>
+                          </p:cTn>
+                        </p:par>
+                      </p:childTnLst>
+                    </p:cTn>
+                  </p:par>
+                </p:childTnLst>
+              </p:cTn>
+              <p:prevCondLst>
+                <p:cond evt="onPrev" delay="0">
+                  <p:tgtEl>
+                    <p:sldTgt/>
+                  </p:tgtEl>
+                </p:cond>
+              </p:prevCondLst>
+              <p:nextCondLst>
+                <p:cond evt="onNext" delay="0">
+                  <p:tgtEl>
+                    <p:sldTgt/>
+                  </p:tgtEl>
+                </p:cond>
+              </p:nextCondLst>
+            </p:seq>
+          </p:childTnLst>
+        </p:cTn>
+      </p:par>
+    </p:tnLst>
+    <p:bldLst>
+      <p:bldP spid="7" grpId="0"/>
+      <p:bldP spid="8" grpId="0"/>
+      <p:bldP spid="9" grpId="0"/>
+      <p:bldP spid="10" grpId="0"/>
+      <p:bldP spid="11" grpId="0"/>
+      <p:bldP spid="12" grpId="0"/>
+      <p:bldP spid="13" grpId="0"/>
+      <p:bldP spid="14" grpId="0"/>
+      <p:bldP spid="15" grpId="0"/>
+      <p:bldP spid="16" grpId="0"/>
+      <p:bldP spid="17" grpId="0"/>
+      <p:bldP spid="18" grpId="0"/>
+      <p:bldP spid="19" grpId="0"/>
+    </p:bldLst>
+  </p:timing>
+</p:sld>
+</file>
+
+<file path=ppt/slides/slide5.xml><?xml version="1.0" encoding="utf-8"?>
+<p:sld xmlns:a="http://schemas.openxmlformats.org/drawingml/2006/main" xmlns:p="http://schemas.openxmlformats.org/presentationml/2006/main" xmlns:r="http://schemas.openxmlformats.org/officeDocument/2006/relationships">
+  <p:cSld>
+    <p:spTree>
+      <p:nvGrpSpPr>
+        <p:cNvPr id="1" name=""/>
+        <p:cNvGrpSpPr/>
+        <p:nvPr/>
+      </p:nvGrpSpPr>
+      <p:grpSpPr/>
+      <p:sp>
+        <p:nvSpPr>
+          <p:cNvPr id="2" name="TextBox 1"/>
+          <p:cNvSpPr txBox="1"/>
+          <p:nvPr/>
+        </p:nvSpPr>
+        <p:spPr>
+          <a:xfrm>
+            <a:off x="8625535" y="201168"/>
+            <a:ext cx="3291840" cy="365760"/>
+          </a:xfrm>
+          <a:prstGeom prst="rect">
+            <a:avLst/>
+          </a:prstGeom>
+          <a:noFill/>
+        </p:spPr>
+        <p:txBody>
+          <a:bodyPr wrap="square" lIns="0" rIns="0" tIns="0" bIns="0">
+            <a:spAutoFit/>
+          </a:bodyPr>
+          <a:lstStyle/>
+          <a:p>
+            <a:pPr algn="r"/>
+            <a:r>
+              <a:rPr sz="1800" b="0">
+                <a:solidFill>
+                  <a:srgbClr val="1A1A18"/>
+                </a:solidFill>
+                <a:latin typeface="DM Serif Display"/>
+              </a:rPr>
+              <a:t>afgeleide</a:t>
+            </a:r>
+            <a:r>
+              <a:rPr sz="1800" b="0">
+                <a:solidFill>
+                  <a:srgbClr val="2D6A4F"/>
+                </a:solidFill>
+                <a:latin typeface="DM Serif Display"/>
+              </a:rPr>
+              <a:t>oefenen</a:t>
+            </a:r>
+            <a:r>
+              <a:rPr sz="1800" b="0">
+                <a:solidFill>
+                  <a:srgbClr val="1A1A18"/>
+                </a:solidFill>
+                <a:latin typeface="DM Serif Display"/>
+              </a:rPr>
+              <a:t>.nl</a:t>
+            </a:r>
+          </a:p>
+        </p:txBody>
+      </p:sp>
+      <p:pic>
+        <p:nvPicPr>
+          <p:cNvPr id="3" name="Picture 2" descr="aaf-wave.png"/>
+          <p:cNvPicPr>
+            <a:picLocks noChangeAspect="1"/>
+          </p:cNvPicPr>
+          <p:nvPr/>
+        </p:nvPicPr>
+        <p:blipFill>
+          <a:blip r:embed="rId2"/>
+          <a:stretch>
+            <a:fillRect/>
+          </a:stretch>
+        </p:blipFill>
+        <p:spPr>
+          <a:xfrm>
+            <a:off x="10235895" y="4526280"/>
+            <a:ext cx="1635760" cy="2103120"/>
+          </a:xfrm>
+          <a:prstGeom prst="rect">
+            <a:avLst/>
+          </a:prstGeom>
+        </p:spPr>
+      </p:pic>
+      <p:sp>
+        <p:nvSpPr>
+          <p:cNvPr id="4" name="TextBox 3"/>
+          <p:cNvSpPr txBox="1"/>
+          <p:nvPr/>
+        </p:nvSpPr>
+        <p:spPr>
+          <a:xfrm>
+            <a:off x="914400" y="457200"/>
+            <a:ext cx="9144000" cy="640080"/>
+          </a:xfrm>
+          <a:prstGeom prst="rect">
+            <a:avLst/>
+          </a:prstGeom>
+          <a:noFill/>
+        </p:spPr>
+        <p:txBody>
+          <a:bodyPr wrap="square" lIns="0" rIns="0" tIns="0" bIns="0">
+            <a:spAutoFit/>
+          </a:bodyPr>
+          <a:lstStyle/>
+          <a:p>
+            <a:pPr algn="ctr"/>
+            <a:r>
+              <a:rPr sz="3200" b="1">
+                <a:solidFill>
+                  <a:srgbClr val="1A1A18"/>
+                </a:solidFill>
+                <a:latin typeface="DM Serif Display"/>
+              </a:rPr>
+              <a:t>Voeg alles </a:t>
+            </a:r>
+            <a:r>
+              <a:rPr sz="3200" b="1">
+                <a:solidFill>
+                  <a:srgbClr val="2D6A4F"/>
+                </a:solidFill>
+                <a:latin typeface="DM Serif Display"/>
+              </a:rPr>
+              <a:t>samen</a:t>
+            </a:r>
+          </a:p>
+        </p:txBody>
+      </p:sp>
+      <p:pic>
+        <p:nvPicPr>
+          <p:cNvPr id="5" name="Picture 4" descr="opgave.png"/>
+          <p:cNvPicPr>
+            <a:picLocks noChangeAspect="1"/>
+          </p:cNvPicPr>
+          <p:nvPr/>
+        </p:nvPicPr>
+        <p:blipFill>
+          <a:blip r:embed="rId3"/>
+          <a:stretch>
+            <a:fillRect/>
+          </a:stretch>
+        </p:blipFill>
+        <p:spPr>
+          <a:xfrm>
+            <a:off x="3474720" y="1325880"/>
+            <a:ext cx="4023360" cy="459084"/>
+          </a:xfrm>
+          <a:prstGeom prst="rect">
+            <a:avLst/>
+          </a:prstGeom>
+        </p:spPr>
+      </p:pic>
+      <p:pic>
+        <p:nvPicPr>
+          <p:cNvPr id="6" name="Picture 5" descr="samen-h-afgeleide.png"/>
+          <p:cNvPicPr>
+            <a:picLocks noChangeAspect="1"/>
+          </p:cNvPicPr>
+          <p:nvPr/>
+        </p:nvPicPr>
+        <p:blipFill>
+          <a:blip r:embed="rId4"/>
+          <a:stretch>
+            <a:fillRect/>
+          </a:stretch>
+        </p:blipFill>
+        <p:spPr>
+          <a:xfrm>
+            <a:off x="3657600" y="2377440"/>
+            <a:ext cx="3657600" cy="440243"/>
+          </a:xfrm>
+          <a:prstGeom prst="rect">
+            <a:avLst/>
+          </a:prstGeom>
+        </p:spPr>
+      </p:pic>
+      <p:pic>
+        <p:nvPicPr>
+          <p:cNvPr id="7" name="Picture 6" descr="samen-symbolisch.png"/>
+          <p:cNvPicPr>
+            <a:picLocks noChangeAspect="1"/>
+          </p:cNvPicPr>
+          <p:nvPr/>
+        </p:nvPicPr>
+        <p:blipFill>
+          <a:blip r:embed="rId5"/>
+          <a:stretch>
+            <a:fillRect/>
+          </a:stretch>
+        </p:blipFill>
+        <p:spPr>
+          <a:xfrm>
+            <a:off x="3840480" y="3291840"/>
+            <a:ext cx="3291840" cy="366510"/>
+          </a:xfrm>
+          <a:prstGeom prst="rect">
+            <a:avLst/>
+          </a:prstGeom>
+        </p:spPr>
+      </p:pic>
+      <p:pic>
+        <p:nvPicPr>
+          <p:cNvPr id="8" name="Picture 7" descr="samen-ingevuld.png"/>
+          <p:cNvPicPr>
+            <a:picLocks noChangeAspect="1"/>
+          </p:cNvPicPr>
+          <p:nvPr/>
+        </p:nvPicPr>
+        <p:blipFill>
+          <a:blip r:embed="rId6"/>
+          <a:stretch>
+            <a:fillRect/>
+          </a:stretch>
+        </p:blipFill>
+        <p:spPr>
+          <a:xfrm>
+            <a:off x="3474720" y="4206240"/>
+            <a:ext cx="4023360" cy="395524"/>
+          </a:xfrm>
+          <a:prstGeom prst="rect">
+            <a:avLst/>
+          </a:prstGeom>
+        </p:spPr>
+      </p:pic>
+      <p:pic>
+        <p:nvPicPr>
+          <p:cNvPr id="9" name="Picture 8" descr="eindantwoord.png"/>
+          <p:cNvPicPr>
+            <a:picLocks noChangeAspect="1"/>
+          </p:cNvPicPr>
+          <p:nvPr/>
+        </p:nvPicPr>
+        <p:blipFill>
+          <a:blip r:embed="rId7"/>
+          <a:stretch>
+            <a:fillRect/>
+          </a:stretch>
+        </p:blipFill>
+        <p:spPr>
+          <a:xfrm>
+            <a:off x="3108960" y="5212080"/>
+            <a:ext cx="4754880" cy="484688"/>
+          </a:xfrm>
+          <a:prstGeom prst="rect">
+            <a:avLst/>
+          </a:prstGeom>
+        </p:spPr>
+      </p:pic>
     </p:spTree>
   </p:cSld>
   <p:clrMapOvr>
@@ -3932,7 +6996,7 @@
                                           </p:stCondLst>
                                         </p:cTn>
                                         <p:tgtEl>
-                                          <p:spTgt spid="4"/>
+                                          <p:spTgt spid="6"/>
                                         </p:tgtEl>
                                         <p:attrNameLst>
                                           <p:attrName>style.visibility</p:attrName>
@@ -3964,7 +7028,7 @@
                             </p:stCondLst>
                             <p:childTnLst>
                               <p:par>
-                                <p:cTn id="11" presetID="1" presetClass="exit" presetSubtype="0" fill="hold" grpId="0" nodeType="clickEffect">
+                                <p:cTn id="11" presetID="1" presetClass="entr" presetSubtype="0" fill="hold" grpId="0" nodeType="clickEffect">
                                   <p:stCondLst>
                                     <p:cond delay="0"/>
                                   </p:stCondLst>
@@ -3977,14 +7041,14 @@
                                           </p:stCondLst>
                                         </p:cTn>
                                         <p:tgtEl>
-                                          <p:spTgt spid="4"/>
+                                          <p:spTgt spid="7"/>
                                         </p:tgtEl>
                                         <p:attrNameLst>
                                           <p:attrName>style.visibility</p:attrName>
                                         </p:attrNameLst>
                                       </p:cBhvr>
                                       <p:to>
-                                        <p:strVal val="hidden"/>
+                                        <p:strVal val="visible"/>
                                       </p:to>
                                     </p:set>
                                   </p:childTnLst>
@@ -4022,7 +7086,7 @@
                                           </p:stCondLst>
                                         </p:cTn>
                                         <p:tgtEl>
-                                          <p:spTgt spid="6"/>
+                                          <p:spTgt spid="8"/>
                                         </p:tgtEl>
                                         <p:attrNameLst>
                                           <p:attrName>style.visibility</p:attrName>
@@ -4067,286 +7131,7 @@
                                           </p:stCondLst>
                                         </p:cTn>
                                         <p:tgtEl>
-                                          <p:spTgt spid="7"/>
-                                        </p:tgtEl>
-                                        <p:attrNameLst>
-                                          <p:attrName>style.visibility</p:attrName>
-                                        </p:attrNameLst>
-                                      </p:cBhvr>
-                                      <p:to>
-                                        <p:strVal val="visible"/>
-                                      </p:to>
-                                    </p:set>
-                                  </p:childTnLst>
-                                </p:cTn>
-                              </p:par>
-                            </p:childTnLst>
-                          </p:cTn>
-                        </p:par>
-                      </p:childTnLst>
-                    </p:cTn>
-                  </p:par>
-                  <p:par>
-                    <p:cTn id="26" fill="hold">
-                      <p:stCondLst>
-                        <p:cond delay="indefinite"/>
-                      </p:stCondLst>
-                      <p:childTnLst>
-                        <p:par>
-                          <p:cTn id="25" fill="hold">
-                            <p:stCondLst>
-                              <p:cond delay="0"/>
-                            </p:stCondLst>
-                            <p:childTnLst>
-                              <p:par>
-                                <p:cTn id="23" presetID="1" presetClass="entr" presetSubtype="0" fill="hold" grpId="0" nodeType="clickEffect">
-                                  <p:stCondLst>
-                                    <p:cond delay="0"/>
-                                  </p:stCondLst>
-                                  <p:childTnLst>
-                                    <p:set>
-                                      <p:cBhvr>
-                                        <p:cTn id="24" dur="1" fill="hold">
-                                          <p:stCondLst>
-                                            <p:cond delay="0"/>
-                                          </p:stCondLst>
-                                        </p:cTn>
-                                        <p:tgtEl>
-                                          <p:spTgt spid="8"/>
-                                        </p:tgtEl>
-                                        <p:attrNameLst>
-                                          <p:attrName>style.visibility</p:attrName>
-                                        </p:attrNameLst>
-                                      </p:cBhvr>
-                                      <p:to>
-                                        <p:strVal val="visible"/>
-                                      </p:to>
-                                    </p:set>
-                                  </p:childTnLst>
-                                </p:cTn>
-                              </p:par>
-                            </p:childTnLst>
-                          </p:cTn>
-                        </p:par>
-                      </p:childTnLst>
-                    </p:cTn>
-                  </p:par>
-                  <p:par>
-                    <p:cTn id="32" fill="hold">
-                      <p:stCondLst>
-                        <p:cond delay="indefinite"/>
-                      </p:stCondLst>
-                      <p:childTnLst>
-                        <p:par>
-                          <p:cTn id="31" fill="hold">
-                            <p:stCondLst>
-                              <p:cond delay="0"/>
-                            </p:stCondLst>
-                            <p:childTnLst>
-                              <p:par>
-                                <p:cTn id="27" presetID="1" presetClass="entr" presetSubtype="0" fill="hold" grpId="0" nodeType="clickEffect">
-                                  <p:stCondLst>
-                                    <p:cond delay="0"/>
-                                  </p:stCondLst>
-                                  <p:childTnLst>
-                                    <p:set>
-                                      <p:cBhvr>
-                                        <p:cTn id="28" dur="1" fill="hold">
-                                          <p:stCondLst>
-                                            <p:cond delay="0"/>
-                                          </p:stCondLst>
-                                        </p:cTn>
-                                        <p:tgtEl>
                                           <p:spTgt spid="9"/>
-                                        </p:tgtEl>
-                                        <p:attrNameLst>
-                                          <p:attrName>style.visibility</p:attrName>
-                                        </p:attrNameLst>
-                                      </p:cBhvr>
-                                      <p:to>
-                                        <p:strVal val="visible"/>
-                                      </p:to>
-                                    </p:set>
-                                  </p:childTnLst>
-                                </p:cTn>
-                              </p:par>
-                              <p:par>
-                                <p:cTn id="29" presetID="1" presetClass="entr" presetSubtype="0" fill="hold" grpId="0" nodeType="withEffect">
-                                  <p:stCondLst>
-                                    <p:cond delay="0"/>
-                                  </p:stCondLst>
-                                  <p:childTnLst>
-                                    <p:set>
-                                      <p:cBhvr>
-                                        <p:cTn id="30" dur="1" fill="hold">
-                                          <p:stCondLst>
-                                            <p:cond delay="0"/>
-                                          </p:stCondLst>
-                                        </p:cTn>
-                                        <p:tgtEl>
-                                          <p:spTgt spid="10"/>
-                                        </p:tgtEl>
-                                        <p:attrNameLst>
-                                          <p:attrName>style.visibility</p:attrName>
-                                        </p:attrNameLst>
-                                      </p:cBhvr>
-                                      <p:to>
-                                        <p:strVal val="visible"/>
-                                      </p:to>
-                                    </p:set>
-                                  </p:childTnLst>
-                                </p:cTn>
-                              </p:par>
-                            </p:childTnLst>
-                          </p:cTn>
-                        </p:par>
-                      </p:childTnLst>
-                    </p:cTn>
-                  </p:par>
-                  <p:par>
-                    <p:cTn id="36" fill="hold">
-                      <p:stCondLst>
-                        <p:cond delay="indefinite"/>
-                      </p:stCondLst>
-                      <p:childTnLst>
-                        <p:par>
-                          <p:cTn id="35" fill="hold">
-                            <p:stCondLst>
-                              <p:cond delay="0"/>
-                            </p:stCondLst>
-                            <p:childTnLst>
-                              <p:par>
-                                <p:cTn id="33" presetID="1" presetClass="entr" presetSubtype="0" fill="hold" grpId="0" nodeType="clickEffect">
-                                  <p:stCondLst>
-                                    <p:cond delay="0"/>
-                                  </p:stCondLst>
-                                  <p:childTnLst>
-                                    <p:set>
-                                      <p:cBhvr>
-                                        <p:cTn id="34" dur="1" fill="hold">
-                                          <p:stCondLst>
-                                            <p:cond delay="0"/>
-                                          </p:stCondLst>
-                                        </p:cTn>
-                                        <p:tgtEl>
-                                          <p:spTgt spid="11"/>
-                                        </p:tgtEl>
-                                        <p:attrNameLst>
-                                          <p:attrName>style.visibility</p:attrName>
-                                        </p:attrNameLst>
-                                      </p:cBhvr>
-                                      <p:to>
-                                        <p:strVal val="visible"/>
-                                      </p:to>
-                                    </p:set>
-                                  </p:childTnLst>
-                                </p:cTn>
-                              </p:par>
-                            </p:childTnLst>
-                          </p:cTn>
-                        </p:par>
-                      </p:childTnLst>
-                    </p:cTn>
-                  </p:par>
-                  <p:par>
-                    <p:cTn id="42" fill="hold">
-                      <p:stCondLst>
-                        <p:cond delay="indefinite"/>
-                      </p:stCondLst>
-                      <p:childTnLst>
-                        <p:par>
-                          <p:cTn id="41" fill="hold">
-                            <p:stCondLst>
-                              <p:cond delay="0"/>
-                            </p:stCondLst>
-                            <p:childTnLst>
-                              <p:par>
-                                <p:cTn id="37" presetID="1" presetClass="entr" presetSubtype="0" fill="hold" grpId="0" nodeType="clickEffect">
-                                  <p:stCondLst>
-                                    <p:cond delay="0"/>
-                                  </p:stCondLst>
-                                  <p:childTnLst>
-                                    <p:set>
-                                      <p:cBhvr>
-                                        <p:cTn id="38" dur="1" fill="hold">
-                                          <p:stCondLst>
-                                            <p:cond delay="0"/>
-                                          </p:stCondLst>
-                                        </p:cTn>
-                                        <p:tgtEl>
-                                          <p:spTgt spid="12"/>
-                                        </p:tgtEl>
-                                        <p:attrNameLst>
-                                          <p:attrName>style.visibility</p:attrName>
-                                        </p:attrNameLst>
-                                      </p:cBhvr>
-                                      <p:to>
-                                        <p:strVal val="visible"/>
-                                      </p:to>
-                                    </p:set>
-                                  </p:childTnLst>
-                                </p:cTn>
-                              </p:par>
-                              <p:par>
-                                <p:cTn id="39" presetID="1" presetClass="entr" presetSubtype="0" fill="hold" grpId="0" nodeType="withEffect">
-                                  <p:stCondLst>
-                                    <p:cond delay="0"/>
-                                  </p:stCondLst>
-                                  <p:childTnLst>
-                                    <p:set>
-                                      <p:cBhvr>
-                                        <p:cTn id="40" dur="1" fill="hold">
-                                          <p:stCondLst>
-                                            <p:cond delay="0"/>
-                                          </p:stCondLst>
-                                        </p:cTn>
-                                        <p:tgtEl>
-                                          <p:spTgt spid="13"/>
-                                        </p:tgtEl>
-                                        <p:attrNameLst>
-                                          <p:attrName>style.visibility</p:attrName>
-                                        </p:attrNameLst>
-                                      </p:cBhvr>
-                                      <p:to>
-                                        <p:strVal val="visible"/>
-                                      </p:to>
-                                    </p:set>
-                                  </p:childTnLst>
-                                </p:cTn>
-                              </p:par>
-                            </p:childTnLst>
-                          </p:cTn>
-                        </p:par>
-                      </p:childTnLst>
-                    </p:cTn>
-                  </p:par>
-                  <p:par>
-                    <p:cTn id="46" fill="hold">
-                      <p:stCondLst>
-                        <p:cond delay="indefinite"/>
-                      </p:stCondLst>
-                      <p:childTnLst>
-                        <p:par>
-                          <p:cTn id="45" fill="hold">
-                            <p:stCondLst>
-                              <p:cond delay="0"/>
-                            </p:stCondLst>
-                            <p:childTnLst>
-                              <p:par>
-                                <p:cTn id="43" presetID="1" presetClass="entr" presetSubtype="0" fill="hold" grpId="0" nodeType="clickEffect">
-                                  <p:stCondLst>
-                                    <p:cond delay="0"/>
-                                  </p:stCondLst>
-                                  <p:childTnLst>
-                                    <p:set>
-                                      <p:cBhvr>
-                                        <p:cTn id="44" dur="1" fill="hold">
-                                          <p:stCondLst>
-                                            <p:cond delay="0"/>
-                                          </p:stCondLst>
-                                        </p:cTn>
-                                        <p:tgtEl>
-                                          <p:spTgt spid="14"/>
                                         </p:tgtEl>
                                         <p:attrNameLst>
                                           <p:attrName>style.visibility</p:attrName>
@@ -4388,1592 +7173,10 @@
     </p:tnLst>
     <p:bldLst>
       <p:bldP spid="5" grpId="0"/>
-      <p:bldP spid="4" grpId="0"/>
-      <p:bldP spid="4" grpId="0"/>
       <p:bldP spid="6" grpId="0"/>
       <p:bldP spid="7" grpId="0"/>
       <p:bldP spid="8" grpId="0"/>
       <p:bldP spid="9" grpId="0"/>
-      <p:bldP spid="10" grpId="0"/>
-      <p:bldP spid="11" grpId="0"/>
-      <p:bldP spid="12" grpId="0"/>
-      <p:bldP spid="13" grpId="0"/>
-      <p:bldP spid="14" grpId="0"/>
-    </p:bldLst>
-  </p:timing>
-</p:sld>
-</file>
-
-<file path=ppt/slides/slide3.xml><?xml version="1.0" encoding="utf-8"?>
-<p:sld xmlns:a="http://schemas.openxmlformats.org/drawingml/2006/main" xmlns:p="http://schemas.openxmlformats.org/presentationml/2006/main" xmlns:r="http://schemas.openxmlformats.org/officeDocument/2006/relationships">
-  <p:cSld>
-    <p:spTree>
-      <p:nvGrpSpPr>
-        <p:cNvPr id="1" name=""/>
-        <p:cNvGrpSpPr/>
-        <p:nvPr/>
-      </p:nvGrpSpPr>
-      <p:grpSpPr/>
-      <p:sp>
-        <p:nvSpPr>
-          <p:cNvPr id="2" name="TextBox 1"/>
-          <p:cNvSpPr txBox="1"/>
-          <p:nvPr/>
-        </p:nvSpPr>
-        <p:spPr>
-          <a:xfrm>
-            <a:off x="8625535" y="201168"/>
-            <a:ext cx="3291840" cy="365760"/>
-          </a:xfrm>
-          <a:prstGeom prst="rect">
-            <a:avLst/>
-          </a:prstGeom>
-          <a:noFill/>
-        </p:spPr>
-        <p:txBody>
-          <a:bodyPr wrap="square" lIns="0" rIns="0" tIns="0" bIns="0">
-            <a:spAutoFit/>
-          </a:bodyPr>
-          <a:lstStyle/>
-          <a:p>
-            <a:pPr algn="r"/>
-            <a:r>
-              <a:rPr sz="1800" b="0">
-                <a:solidFill>
-                  <a:srgbClr val="1A1A18"/>
-                </a:solidFill>
-                <a:latin typeface="DM Serif Display"/>
-              </a:rPr>
-              <a:t>afgeleide</a:t>
-            </a:r>
-            <a:r>
-              <a:rPr sz="1800" b="0">
-                <a:solidFill>
-                  <a:srgbClr val="2D6A4F"/>
-                </a:solidFill>
-                <a:latin typeface="DM Serif Display"/>
-              </a:rPr>
-              <a:t>oefenen</a:t>
-            </a:r>
-            <a:r>
-              <a:rPr sz="1800" b="0">
-                <a:solidFill>
-                  <a:srgbClr val="1A1A18"/>
-                </a:solidFill>
-                <a:latin typeface="DM Serif Display"/>
-              </a:rPr>
-              <a:t>.nl</a:t>
-            </a:r>
-          </a:p>
-        </p:txBody>
-      </p:sp>
-      <p:pic>
-        <p:nvPicPr>
-          <p:cNvPr id="3" name="Picture 2" descr="aaf-point.png"/>
-          <p:cNvPicPr>
-            <a:picLocks noChangeAspect="1"/>
-          </p:cNvPicPr>
-          <p:nvPr/>
-        </p:nvPicPr>
-        <p:blipFill>
-          <a:blip r:embed="rId2"/>
-          <a:stretch>
-            <a:fillRect/>
-          </a:stretch>
-        </p:blipFill>
-        <p:spPr>
-          <a:xfrm>
-            <a:off x="10235895" y="4526280"/>
-            <a:ext cx="1635760" cy="2103120"/>
-          </a:xfrm>
-          <a:prstGeom prst="rect">
-            <a:avLst/>
-          </a:prstGeom>
-        </p:spPr>
-      </p:pic>
-      <p:sp>
-        <p:nvSpPr>
-          <p:cNvPr id="4" name="TextBox 3"/>
-          <p:cNvSpPr txBox="1"/>
-          <p:nvPr/>
-        </p:nvSpPr>
-        <p:spPr>
-          <a:xfrm>
-            <a:off x="2286000" y="228600"/>
-            <a:ext cx="6400800" cy="640080"/>
-          </a:xfrm>
-          <a:prstGeom prst="rect">
-            <a:avLst/>
-          </a:prstGeom>
-          <a:noFill/>
-        </p:spPr>
-        <p:txBody>
-          <a:bodyPr wrap="square" lIns="0" rIns="0" tIns="0" bIns="0">
-            <a:spAutoFit/>
-          </a:bodyPr>
-          <a:lstStyle/>
-          <a:p>
-            <a:pPr algn="ctr"/>
-            <a:r>
-              <a:rPr sz="3200" b="1">
-                <a:solidFill>
-                  <a:srgbClr val="1A1A18"/>
-                </a:solidFill>
-                <a:latin typeface="DM Serif Display"/>
-              </a:rPr>
-              <a:t>De </a:t>
-            </a:r>
-            <a:r>
-              <a:rPr sz="3200" b="1">
-                <a:solidFill>
-                  <a:srgbClr val="C94F4A"/>
-                </a:solidFill>
-                <a:latin typeface="DM Serif Display"/>
-              </a:rPr>
-              <a:t>productregel</a:t>
-            </a:r>
-          </a:p>
-        </p:txBody>
-      </p:sp>
-      <p:sp>
-        <p:nvSpPr>
-          <p:cNvPr id="5" name="Rounded Rectangle 4"/>
-          <p:cNvSpPr/>
-          <p:nvPr/>
-        </p:nvSpPr>
-        <p:spPr>
-          <a:xfrm>
-            <a:off x="1371600" y="960120"/>
-            <a:ext cx="8229600" cy="868680"/>
-          </a:xfrm>
-          <a:prstGeom prst="roundRect">
-            <a:avLst>
-              <a:gd name="adj" fmla="val 12000"/>
-            </a:avLst>
-          </a:prstGeom>
-          <a:solidFill>
-            <a:srgbClr val="E8F5EE"/>
-          </a:solidFill>
-          <a:ln>
-            <a:noFill/>
-          </a:ln>
-          <a:effectLst/>
-        </p:spPr>
-        <p:style>
-          <a:lnRef idx="1">
-            <a:schemeClr val="accent1"/>
-          </a:lnRef>
-          <a:fillRef idx="3">
-            <a:schemeClr val="accent1"/>
-          </a:fillRef>
-          <a:effectRef idx="2">
-            <a:schemeClr val="accent1"/>
-          </a:effectRef>
-          <a:fontRef idx="minor">
-            <a:schemeClr val="lt1"/>
-          </a:fontRef>
-        </p:style>
-        <p:txBody>
-          <a:bodyPr rtlCol="0" anchor="ctr"/>
-          <a:lstStyle/>
-          <a:p>
-            <a:pPr algn="ctr"/>
-          </a:p>
-        </p:txBody>
-      </p:sp>
-      <p:pic>
-        <p:nvPicPr>
-          <p:cNvPr id="6" name="Picture 5" descr="regel-product.png"/>
-          <p:cNvPicPr>
-            <a:picLocks noChangeAspect="1"/>
-          </p:cNvPicPr>
-          <p:nvPr/>
-        </p:nvPicPr>
-        <p:blipFill>
-          <a:blip r:embed="rId3"/>
-          <a:stretch>
-            <a:fillRect/>
-          </a:stretch>
-        </p:blipFill>
-        <p:spPr>
-          <a:xfrm>
-            <a:off x="1737360" y="1170432"/>
-            <a:ext cx="7498079" cy="344513"/>
-          </a:xfrm>
-          <a:prstGeom prst="rect">
-            <a:avLst/>
-          </a:prstGeom>
-        </p:spPr>
-      </p:pic>
-      <p:sp>
-        <p:nvSpPr>
-          <p:cNvPr id="7" name="Rounded Rectangle 6"/>
-          <p:cNvSpPr/>
-          <p:nvPr/>
-        </p:nvSpPr>
-        <p:spPr>
-          <a:xfrm>
-            <a:off x="1371600" y="2057400"/>
-            <a:ext cx="2560320" cy="457200"/>
-          </a:xfrm>
-          <a:prstGeom prst="roundRect">
-            <a:avLst>
-              <a:gd name="adj" fmla="val 50000"/>
-            </a:avLst>
-          </a:prstGeom>
-          <a:solidFill>
-            <a:srgbClr val="E8F5EE"/>
-          </a:solidFill>
-          <a:ln>
-            <a:noFill/>
-          </a:ln>
-          <a:effectLst/>
-        </p:spPr>
-        <p:style>
-          <a:lnRef idx="1">
-            <a:schemeClr val="accent1"/>
-          </a:lnRef>
-          <a:fillRef idx="3">
-            <a:schemeClr val="accent1"/>
-          </a:fillRef>
-          <a:effectRef idx="2">
-            <a:schemeClr val="accent1"/>
-          </a:effectRef>
-          <a:fontRef idx="minor">
-            <a:schemeClr val="lt1"/>
-          </a:fontRef>
-        </p:style>
-        <p:txBody>
-          <a:bodyPr rtlCol="0" anchor="ctr" lIns="76200" rIns="76200"/>
-          <a:lstStyle/>
-          <a:p>
-            <a:pPr algn="ctr"/>
-            <a:r>
-              <a:rPr sz="1400" b="1">
-                <a:solidFill>
-                  <a:srgbClr val="2D6A4F"/>
-                </a:solidFill>
-                <a:latin typeface="DM Sans"/>
-              </a:rPr>
-              <a:t>Stap 1 · kies g en h</a:t>
-            </a:r>
-          </a:p>
-        </p:txBody>
-      </p:sp>
-      <p:sp>
-        <p:nvSpPr>
-          <p:cNvPr id="8" name="Rounded Rectangle 7"/>
-          <p:cNvSpPr/>
-          <p:nvPr/>
-        </p:nvSpPr>
-        <p:spPr>
-          <a:xfrm>
-            <a:off x="4206240" y="2057400"/>
-            <a:ext cx="2560320" cy="457200"/>
-          </a:xfrm>
-          <a:prstGeom prst="roundRect">
-            <a:avLst>
-              <a:gd name="adj" fmla="val 50000"/>
-            </a:avLst>
-          </a:prstGeom>
-          <a:solidFill>
-            <a:srgbClr val="E8F5EE"/>
-          </a:solidFill>
-          <a:ln>
-            <a:noFill/>
-          </a:ln>
-          <a:effectLst/>
-        </p:spPr>
-        <p:style>
-          <a:lnRef idx="1">
-            <a:schemeClr val="accent1"/>
-          </a:lnRef>
-          <a:fillRef idx="3">
-            <a:schemeClr val="accent1"/>
-          </a:fillRef>
-          <a:effectRef idx="2">
-            <a:schemeClr val="accent1"/>
-          </a:effectRef>
-          <a:fontRef idx="minor">
-            <a:schemeClr val="lt1"/>
-          </a:fontRef>
-        </p:style>
-        <p:txBody>
-          <a:bodyPr rtlCol="0" anchor="ctr" lIns="76200" rIns="76200"/>
-          <a:lstStyle/>
-          <a:p>
-            <a:pPr algn="ctr"/>
-            <a:r>
-              <a:rPr sz="1300" b="1">
-                <a:solidFill>
-                  <a:srgbClr val="2D6A4F"/>
-                </a:solidFill>
-                <a:latin typeface="DM Sans"/>
-              </a:rPr>
-              <a:t>Stap 2 · bepaal de afgeleiden</a:t>
-            </a:r>
-          </a:p>
-        </p:txBody>
-      </p:sp>
-      <p:sp>
-        <p:nvSpPr>
-          <p:cNvPr id="9" name="Rounded Rectangle 8"/>
-          <p:cNvSpPr/>
-          <p:nvPr/>
-        </p:nvSpPr>
-        <p:spPr>
-          <a:xfrm>
-            <a:off x="7040880" y="2057400"/>
-            <a:ext cx="2560320" cy="457200"/>
-          </a:xfrm>
-          <a:prstGeom prst="roundRect">
-            <a:avLst>
-              <a:gd name="adj" fmla="val 50000"/>
-            </a:avLst>
-          </a:prstGeom>
-          <a:solidFill>
-            <a:srgbClr val="E8F5EE"/>
-          </a:solidFill>
-          <a:ln>
-            <a:noFill/>
-          </a:ln>
-          <a:effectLst/>
-        </p:spPr>
-        <p:style>
-          <a:lnRef idx="1">
-            <a:schemeClr val="accent1"/>
-          </a:lnRef>
-          <a:fillRef idx="3">
-            <a:schemeClr val="accent1"/>
-          </a:fillRef>
-          <a:effectRef idx="2">
-            <a:schemeClr val="accent1"/>
-          </a:effectRef>
-          <a:fontRef idx="minor">
-            <a:schemeClr val="lt1"/>
-          </a:fontRef>
-        </p:style>
-        <p:txBody>
-          <a:bodyPr rtlCol="0" anchor="ctr" lIns="76200" rIns="76200"/>
-          <a:lstStyle/>
-          <a:p>
-            <a:pPr algn="ctr"/>
-            <a:r>
-              <a:rPr sz="1300" b="1">
-                <a:solidFill>
-                  <a:srgbClr val="2D6A4F"/>
-                </a:solidFill>
-                <a:latin typeface="DM Sans"/>
-              </a:rPr>
-              <a:t>Stap 3 · vul de formule in</a:t>
-            </a:r>
-          </a:p>
-        </p:txBody>
-      </p:sp>
-      <p:pic>
-        <p:nvPicPr>
-          <p:cNvPr id="10" name="Picture 9" descr="opgave-product.png"/>
-          <p:cNvPicPr>
-            <a:picLocks noChangeAspect="1"/>
-          </p:cNvPicPr>
-          <p:nvPr/>
-        </p:nvPicPr>
-        <p:blipFill>
-          <a:blip r:embed="rId4"/>
-          <a:stretch>
-            <a:fillRect/>
-          </a:stretch>
-        </p:blipFill>
-        <p:spPr>
-          <a:xfrm>
-            <a:off x="3108960" y="2697480"/>
-            <a:ext cx="4754880" cy="380086"/>
-          </a:xfrm>
-          <a:prstGeom prst="rect">
-            <a:avLst/>
-          </a:prstGeom>
-        </p:spPr>
-      </p:pic>
-      <p:cxnSp>
-        <p:nvCxnSpPr>
-          <p:cNvPr id="11" name="Connector 10"/>
-          <p:cNvCxnSpPr/>
-          <p:nvPr/>
-        </p:nvCxnSpPr>
-        <p:spPr>
-          <a:xfrm flipV="1">
-            <a:off x="4215570" y="2670048"/>
-            <a:ext cx="246093" cy="434950"/>
-          </a:xfrm>
-          <a:prstGeom prst="line">
-            <a:avLst/>
-          </a:prstGeom>
-          <a:ln w="31750">
-            <a:solidFill>
-              <a:srgbClr val="C94F4A"/>
-            </a:solidFill>
-          </a:ln>
-          <a:effectLst/>
-        </p:spPr>
-        <p:style>
-          <a:lnRef idx="2">
-            <a:schemeClr val="accent1"/>
-          </a:lnRef>
-          <a:fillRef idx="0">
-            <a:schemeClr val="accent1"/>
-          </a:fillRef>
-          <a:effectRef idx="1">
-            <a:schemeClr val="accent1"/>
-          </a:effectRef>
-          <a:fontRef idx="minor">
-            <a:schemeClr val="tx1"/>
-          </a:fontRef>
-        </p:style>
-      </p:cxnSp>
-      <p:sp>
-        <p:nvSpPr>
-          <p:cNvPr id="12" name="TextBox 11"/>
-          <p:cNvSpPr txBox="1"/>
-          <p:nvPr/>
-        </p:nvSpPr>
-        <p:spPr>
-          <a:xfrm>
-            <a:off x="2286000" y="3200400"/>
-            <a:ext cx="6400800" cy="292608"/>
-          </a:xfrm>
-          <a:prstGeom prst="rect">
-            <a:avLst/>
-          </a:prstGeom>
-          <a:noFill/>
-        </p:spPr>
-        <p:txBody>
-          <a:bodyPr wrap="square" lIns="0" rIns="0" tIns="0" bIns="0">
-            <a:spAutoFit/>
-          </a:bodyPr>
-          <a:lstStyle/>
-          <a:p>
-            <a:pPr algn="ctr"/>
-            <a:r>
-              <a:rPr sz="1300" b="0">
-                <a:solidFill>
-                  <a:srgbClr val="7A7870"/>
-                </a:solidFill>
-                <a:latin typeface="DM Sans"/>
-              </a:rPr>
-              <a:t>zelfde regel — bij ons is de variabele q in plaats van x</a:t>
-            </a:r>
-          </a:p>
-        </p:txBody>
-      </p:sp>
-      <p:sp>
-        <p:nvSpPr>
-          <p:cNvPr id="13" name="Rounded Rectangle 12"/>
-          <p:cNvSpPr/>
-          <p:nvPr/>
-        </p:nvSpPr>
-        <p:spPr>
-          <a:xfrm>
-            <a:off x="1828800" y="3611880"/>
-            <a:ext cx="3108960" cy="1481328"/>
-          </a:xfrm>
-          <a:prstGeom prst="roundRect">
-            <a:avLst>
-              <a:gd name="adj" fmla="val 12000"/>
-            </a:avLst>
-          </a:prstGeom>
-          <a:solidFill>
-            <a:srgbClr val="FFFFFF"/>
-          </a:solidFill>
-          <a:ln w="22225">
-            <a:solidFill>
-              <a:srgbClr val="2D6A4F"/>
-            </a:solidFill>
-          </a:ln>
-          <a:effectLst/>
-        </p:spPr>
-        <p:style>
-          <a:lnRef idx="1">
-            <a:schemeClr val="accent1"/>
-          </a:lnRef>
-          <a:fillRef idx="3">
-            <a:schemeClr val="accent1"/>
-          </a:fillRef>
-          <a:effectRef idx="2">
-            <a:schemeClr val="accent1"/>
-          </a:effectRef>
-          <a:fontRef idx="minor">
-            <a:schemeClr val="lt1"/>
-          </a:fontRef>
-        </p:style>
-        <p:txBody>
-          <a:bodyPr rtlCol="0" anchor="ctr"/>
-          <a:lstStyle/>
-          <a:p>
-            <a:pPr algn="ctr"/>
-          </a:p>
-        </p:txBody>
-      </p:sp>
-      <p:pic>
-        <p:nvPicPr>
-          <p:cNvPr id="14" name="Picture 13" descr="g-def.png"/>
-          <p:cNvPicPr>
-            <a:picLocks noChangeAspect="1"/>
-          </p:cNvPicPr>
-          <p:nvPr/>
-        </p:nvPicPr>
-        <p:blipFill>
-          <a:blip r:embed="rId5"/>
-          <a:stretch>
-            <a:fillRect/>
-          </a:stretch>
-        </p:blipFill>
-        <p:spPr>
-          <a:xfrm>
-            <a:off x="2331720" y="3767328"/>
-            <a:ext cx="2103120" cy="373281"/>
-          </a:xfrm>
-          <a:prstGeom prst="rect">
-            <a:avLst/>
-          </a:prstGeom>
-        </p:spPr>
-      </p:pic>
-      <p:sp>
-        <p:nvSpPr>
-          <p:cNvPr id="15" name="Rounded Rectangle 14"/>
-          <p:cNvSpPr/>
-          <p:nvPr/>
-        </p:nvSpPr>
-        <p:spPr>
-          <a:xfrm>
-            <a:off x="5669280" y="3611880"/>
-            <a:ext cx="3108960" cy="1481328"/>
-          </a:xfrm>
-          <a:prstGeom prst="roundRect">
-            <a:avLst>
-              <a:gd name="adj" fmla="val 12000"/>
-            </a:avLst>
-          </a:prstGeom>
-          <a:solidFill>
-            <a:srgbClr val="FFFFFF"/>
-          </a:solidFill>
-          <a:ln w="22225">
-            <a:solidFill>
-              <a:srgbClr val="2D6A4F"/>
-            </a:solidFill>
-          </a:ln>
-          <a:effectLst/>
-        </p:spPr>
-        <p:style>
-          <a:lnRef idx="1">
-            <a:schemeClr val="accent1"/>
-          </a:lnRef>
-          <a:fillRef idx="3">
-            <a:schemeClr val="accent1"/>
-          </a:fillRef>
-          <a:effectRef idx="2">
-            <a:schemeClr val="accent1"/>
-          </a:effectRef>
-          <a:fontRef idx="minor">
-            <a:schemeClr val="lt1"/>
-          </a:fontRef>
-        </p:style>
-        <p:txBody>
-          <a:bodyPr rtlCol="0" anchor="ctr"/>
-          <a:lstStyle/>
-          <a:p>
-            <a:pPr algn="ctr"/>
-          </a:p>
-        </p:txBody>
-      </p:sp>
-      <p:pic>
-        <p:nvPicPr>
-          <p:cNvPr id="16" name="Picture 15" descr="h-def.png"/>
-          <p:cNvPicPr>
-            <a:picLocks noChangeAspect="1"/>
-          </p:cNvPicPr>
-          <p:nvPr/>
-        </p:nvPicPr>
-        <p:blipFill>
-          <a:blip r:embed="rId6"/>
-          <a:stretch>
-            <a:fillRect/>
-          </a:stretch>
-        </p:blipFill>
-        <p:spPr>
-          <a:xfrm>
-            <a:off x="6172200" y="3767328"/>
-            <a:ext cx="2103120" cy="368729"/>
-          </a:xfrm>
-          <a:prstGeom prst="rect">
-            <a:avLst/>
-          </a:prstGeom>
-        </p:spPr>
-      </p:pic>
-      <p:sp>
-        <p:nvSpPr>
-          <p:cNvPr id="17" name="TextBox 16"/>
-          <p:cNvSpPr txBox="1"/>
-          <p:nvPr/>
-        </p:nvSpPr>
-        <p:spPr>
-          <a:xfrm>
-            <a:off x="3108960" y="4160520"/>
-            <a:ext cx="548640" cy="365760"/>
-          </a:xfrm>
-          <a:prstGeom prst="rect">
-            <a:avLst/>
-          </a:prstGeom>
-          <a:noFill/>
-        </p:spPr>
-        <p:txBody>
-          <a:bodyPr wrap="square" lIns="0" rIns="0" tIns="0" bIns="0">
-            <a:spAutoFit/>
-          </a:bodyPr>
-          <a:lstStyle/>
-          <a:p>
-            <a:pPr algn="ctr"/>
-            <a:r>
-              <a:rPr sz="2200" b="0">
-                <a:solidFill>
-                  <a:srgbClr val="7A7870"/>
-                </a:solidFill>
-                <a:latin typeface="DM Sans"/>
-              </a:rPr>
-              <a:t>↓</a:t>
-            </a:r>
-          </a:p>
-        </p:txBody>
-      </p:sp>
-      <p:pic>
-        <p:nvPicPr>
-          <p:cNvPr id="18" name="Picture 17" descr="g-afgeleide.png"/>
-          <p:cNvPicPr>
-            <a:picLocks noChangeAspect="1"/>
-          </p:cNvPicPr>
-          <p:nvPr/>
-        </p:nvPicPr>
-        <p:blipFill>
-          <a:blip r:embed="rId7"/>
-          <a:stretch>
-            <a:fillRect/>
-          </a:stretch>
-        </p:blipFill>
-        <p:spPr>
-          <a:xfrm>
-            <a:off x="2651760" y="4617720"/>
-            <a:ext cx="1463040" cy="333123"/>
-          </a:xfrm>
-          <a:prstGeom prst="rect">
-            <a:avLst/>
-          </a:prstGeom>
-        </p:spPr>
-      </p:pic>
-      <p:sp>
-        <p:nvSpPr>
-          <p:cNvPr id="19" name="TextBox 18"/>
-          <p:cNvSpPr txBox="1"/>
-          <p:nvPr/>
-        </p:nvSpPr>
-        <p:spPr>
-          <a:xfrm>
-            <a:off x="6949440" y="4160520"/>
-            <a:ext cx="548640" cy="365760"/>
-          </a:xfrm>
-          <a:prstGeom prst="rect">
-            <a:avLst/>
-          </a:prstGeom>
-          <a:noFill/>
-        </p:spPr>
-        <p:txBody>
-          <a:bodyPr wrap="square" lIns="0" rIns="0" tIns="0" bIns="0">
-            <a:spAutoFit/>
-          </a:bodyPr>
-          <a:lstStyle/>
-          <a:p>
-            <a:pPr algn="ctr"/>
-            <a:r>
-              <a:rPr sz="2200" b="0">
-                <a:solidFill>
-                  <a:srgbClr val="7A7870"/>
-                </a:solidFill>
-                <a:latin typeface="DM Sans"/>
-              </a:rPr>
-              <a:t>↓</a:t>
-            </a:r>
-          </a:p>
-        </p:txBody>
-      </p:sp>
-      <p:pic>
-        <p:nvPicPr>
-          <p:cNvPr id="20" name="Picture 19" descr="h-afgeleide.png"/>
-          <p:cNvPicPr>
-            <a:picLocks noChangeAspect="1"/>
-          </p:cNvPicPr>
-          <p:nvPr/>
-        </p:nvPicPr>
-        <p:blipFill>
-          <a:blip r:embed="rId8"/>
-          <a:stretch>
-            <a:fillRect/>
-          </a:stretch>
-        </p:blipFill>
-        <p:spPr>
-          <a:xfrm>
-            <a:off x="6492240" y="4617720"/>
-            <a:ext cx="1463040" cy="326113"/>
-          </a:xfrm>
-          <a:prstGeom prst="rect">
-            <a:avLst/>
-          </a:prstGeom>
-        </p:spPr>
-      </p:pic>
-      <p:pic>
-        <p:nvPicPr>
-          <p:cNvPr id="21" name="Picture 20" descr="invullen-abstract.png"/>
-          <p:cNvPicPr>
-            <a:picLocks noChangeAspect="1"/>
-          </p:cNvPicPr>
-          <p:nvPr/>
-        </p:nvPicPr>
-        <p:blipFill>
-          <a:blip r:embed="rId9"/>
-          <a:stretch>
-            <a:fillRect/>
-          </a:stretch>
-        </p:blipFill>
-        <p:spPr>
-          <a:xfrm>
-            <a:off x="3017520" y="5321808"/>
-            <a:ext cx="4937760" cy="299626"/>
-          </a:xfrm>
-          <a:prstGeom prst="rect">
-            <a:avLst/>
-          </a:prstGeom>
-        </p:spPr>
-      </p:pic>
-      <p:pic>
-        <p:nvPicPr>
-          <p:cNvPr id="22" name="Picture 21" descr="invullen-concreet.png"/>
-          <p:cNvPicPr>
-            <a:picLocks noChangeAspect="1"/>
-          </p:cNvPicPr>
-          <p:nvPr/>
-        </p:nvPicPr>
-        <p:blipFill>
-          <a:blip r:embed="rId10"/>
-          <a:stretch>
-            <a:fillRect/>
-          </a:stretch>
-        </p:blipFill>
-        <p:spPr>
-          <a:xfrm>
-            <a:off x="2743200" y="5797296"/>
-            <a:ext cx="5486400" cy="319023"/>
-          </a:xfrm>
-          <a:prstGeom prst="rect">
-            <a:avLst/>
-          </a:prstGeom>
-        </p:spPr>
-      </p:pic>
-      <p:pic>
-        <p:nvPicPr>
-          <p:cNvPr id="23" name="Picture 22" descr="eindantwoord.png"/>
-          <p:cNvPicPr>
-            <a:picLocks noChangeAspect="1"/>
-          </p:cNvPicPr>
-          <p:nvPr/>
-        </p:nvPicPr>
-        <p:blipFill>
-          <a:blip r:embed="rId11"/>
-          <a:stretch>
-            <a:fillRect/>
-          </a:stretch>
-        </p:blipFill>
-        <p:spPr>
-          <a:xfrm>
-            <a:off x="3657600" y="6309360"/>
-            <a:ext cx="3657600" cy="372837"/>
-          </a:xfrm>
-          <a:prstGeom prst="rect">
-            <a:avLst/>
-          </a:prstGeom>
-        </p:spPr>
-      </p:pic>
-    </p:spTree>
-  </p:cSld>
-  <p:clrMapOvr>
-    <a:masterClrMapping/>
-  </p:clrMapOvr>
-  <p:timing>
-    <p:tnLst>
-      <p:par>
-        <p:cTn id="1" dur="indefinite" restart="never" nodeType="tmRoot">
-          <p:childTnLst>
-            <p:seq concurrent="1" nextAc="seek">
-              <p:cTn id="2" dur="indefinite" nodeType="mainSeq">
-                <p:childTnLst>
-                  <p:par>
-                    <p:cTn id="6" fill="hold">
-                      <p:stCondLst>
-                        <p:cond delay="indefinite"/>
-                      </p:stCondLst>
-                      <p:childTnLst>
-                        <p:par>
-                          <p:cTn id="5" fill="hold">
-                            <p:stCondLst>
-                              <p:cond delay="0"/>
-                            </p:stCondLst>
-                            <p:childTnLst>
-                              <p:par>
-                                <p:cTn id="3" presetID="1" presetClass="entr" presetSubtype="0" fill="hold" grpId="0" nodeType="clickEffect">
-                                  <p:stCondLst>
-                                    <p:cond delay="0"/>
-                                  </p:stCondLst>
-                                  <p:childTnLst>
-                                    <p:set>
-                                      <p:cBhvr>
-                                        <p:cTn id="4" dur="1" fill="hold">
-                                          <p:stCondLst>
-                                            <p:cond delay="0"/>
-                                          </p:stCondLst>
-                                        </p:cTn>
-                                        <p:tgtEl>
-                                          <p:spTgt spid="4"/>
-                                        </p:tgtEl>
-                                        <p:attrNameLst>
-                                          <p:attrName>style.visibility</p:attrName>
-                                        </p:attrNameLst>
-                                      </p:cBhvr>
-                                      <p:to>
-                                        <p:strVal val="visible"/>
-                                      </p:to>
-                                    </p:set>
-                                  </p:childTnLst>
-                                </p:cTn>
-                              </p:par>
-                            </p:childTnLst>
-                          </p:cTn>
-                        </p:par>
-                      </p:childTnLst>
-                    </p:cTn>
-                  </p:par>
-                  <p:par>
-                    <p:cTn id="12" fill="hold">
-                      <p:stCondLst>
-                        <p:cond delay="indefinite"/>
-                      </p:stCondLst>
-                      <p:childTnLst>
-                        <p:par>
-                          <p:cTn id="11" fill="hold">
-                            <p:stCondLst>
-                              <p:cond delay="0"/>
-                            </p:stCondLst>
-                            <p:childTnLst>
-                              <p:par>
-                                <p:cTn id="7" presetID="1" presetClass="entr" presetSubtype="0" fill="hold" grpId="0" nodeType="clickEffect">
-                                  <p:stCondLst>
-                                    <p:cond delay="0"/>
-                                  </p:stCondLst>
-                                  <p:childTnLst>
-                                    <p:set>
-                                      <p:cBhvr>
-                                        <p:cTn id="8" dur="1" fill="hold">
-                                          <p:stCondLst>
-                                            <p:cond delay="0"/>
-                                          </p:stCondLst>
-                                        </p:cTn>
-                                        <p:tgtEl>
-                                          <p:spTgt spid="5"/>
-                                        </p:tgtEl>
-                                        <p:attrNameLst>
-                                          <p:attrName>style.visibility</p:attrName>
-                                        </p:attrNameLst>
-                                      </p:cBhvr>
-                                      <p:to>
-                                        <p:strVal val="visible"/>
-                                      </p:to>
-                                    </p:set>
-                                  </p:childTnLst>
-                                </p:cTn>
-                              </p:par>
-                              <p:par>
-                                <p:cTn id="9" presetID="1" presetClass="entr" presetSubtype="0" fill="hold" grpId="0" nodeType="withEffect">
-                                  <p:stCondLst>
-                                    <p:cond delay="0"/>
-                                  </p:stCondLst>
-                                  <p:childTnLst>
-                                    <p:set>
-                                      <p:cBhvr>
-                                        <p:cTn id="10" dur="1" fill="hold">
-                                          <p:stCondLst>
-                                            <p:cond delay="0"/>
-                                          </p:stCondLst>
-                                        </p:cTn>
-                                        <p:tgtEl>
-                                          <p:spTgt spid="6"/>
-                                        </p:tgtEl>
-                                        <p:attrNameLst>
-                                          <p:attrName>style.visibility</p:attrName>
-                                        </p:attrNameLst>
-                                      </p:cBhvr>
-                                      <p:to>
-                                        <p:strVal val="visible"/>
-                                      </p:to>
-                                    </p:set>
-                                  </p:childTnLst>
-                                </p:cTn>
-                              </p:par>
-                            </p:childTnLst>
-                          </p:cTn>
-                        </p:par>
-                      </p:childTnLst>
-                    </p:cTn>
-                  </p:par>
-                  <p:par>
-                    <p:cTn id="20" fill="hold">
-                      <p:stCondLst>
-                        <p:cond delay="indefinite"/>
-                      </p:stCondLst>
-                      <p:childTnLst>
-                        <p:par>
-                          <p:cTn id="19" fill="hold">
-                            <p:stCondLst>
-                              <p:cond delay="0"/>
-                            </p:stCondLst>
-                            <p:childTnLst>
-                              <p:par>
-                                <p:cTn id="13" presetID="1" presetClass="entr" presetSubtype="0" fill="hold" grpId="0" nodeType="clickEffect">
-                                  <p:stCondLst>
-                                    <p:cond delay="0"/>
-                                  </p:stCondLst>
-                                  <p:childTnLst>
-                                    <p:set>
-                                      <p:cBhvr>
-                                        <p:cTn id="14" dur="1" fill="hold">
-                                          <p:stCondLst>
-                                            <p:cond delay="0"/>
-                                          </p:stCondLst>
-                                        </p:cTn>
-                                        <p:tgtEl>
-                                          <p:spTgt spid="7"/>
-                                        </p:tgtEl>
-                                        <p:attrNameLst>
-                                          <p:attrName>style.visibility</p:attrName>
-                                        </p:attrNameLst>
-                                      </p:cBhvr>
-                                      <p:to>
-                                        <p:strVal val="visible"/>
-                                      </p:to>
-                                    </p:set>
-                                  </p:childTnLst>
-                                </p:cTn>
-                              </p:par>
-                              <p:par>
-                                <p:cTn id="15" presetID="1" presetClass="entr" presetSubtype="0" fill="hold" grpId="0" nodeType="withEffect">
-                                  <p:stCondLst>
-                                    <p:cond delay="0"/>
-                                  </p:stCondLst>
-                                  <p:childTnLst>
-                                    <p:set>
-                                      <p:cBhvr>
-                                        <p:cTn id="16" dur="1" fill="hold">
-                                          <p:stCondLst>
-                                            <p:cond delay="0"/>
-                                          </p:stCondLst>
-                                        </p:cTn>
-                                        <p:tgtEl>
-                                          <p:spTgt spid="8"/>
-                                        </p:tgtEl>
-                                        <p:attrNameLst>
-                                          <p:attrName>style.visibility</p:attrName>
-                                        </p:attrNameLst>
-                                      </p:cBhvr>
-                                      <p:to>
-                                        <p:strVal val="visible"/>
-                                      </p:to>
-                                    </p:set>
-                                  </p:childTnLst>
-                                </p:cTn>
-                              </p:par>
-                              <p:par>
-                                <p:cTn id="17" presetID="1" presetClass="entr" presetSubtype="0" fill="hold" grpId="0" nodeType="withEffect">
-                                  <p:stCondLst>
-                                    <p:cond delay="0"/>
-                                  </p:stCondLst>
-                                  <p:childTnLst>
-                                    <p:set>
-                                      <p:cBhvr>
-                                        <p:cTn id="18" dur="1" fill="hold">
-                                          <p:stCondLst>
-                                            <p:cond delay="0"/>
-                                          </p:stCondLst>
-                                        </p:cTn>
-                                        <p:tgtEl>
-                                          <p:spTgt spid="9"/>
-                                        </p:tgtEl>
-                                        <p:attrNameLst>
-                                          <p:attrName>style.visibility</p:attrName>
-                                        </p:attrNameLst>
-                                      </p:cBhvr>
-                                      <p:to>
-                                        <p:strVal val="visible"/>
-                                      </p:to>
-                                    </p:set>
-                                  </p:childTnLst>
-                                </p:cTn>
-                              </p:par>
-                            </p:childTnLst>
-                          </p:cTn>
-                        </p:par>
-                      </p:childTnLst>
-                    </p:cTn>
-                  </p:par>
-                  <p:par>
-                    <p:cTn id="28" fill="hold">
-                      <p:stCondLst>
-                        <p:cond delay="indefinite"/>
-                      </p:stCondLst>
-                      <p:childTnLst>
-                        <p:par>
-                          <p:cTn id="27" fill="hold">
-                            <p:stCondLst>
-                              <p:cond delay="0"/>
-                            </p:stCondLst>
-                            <p:childTnLst>
-                              <p:par>
-                                <p:cTn id="21" presetID="1" presetClass="entr" presetSubtype="0" fill="hold" grpId="0" nodeType="clickEffect">
-                                  <p:stCondLst>
-                                    <p:cond delay="0"/>
-                                  </p:stCondLst>
-                                  <p:childTnLst>
-                                    <p:set>
-                                      <p:cBhvr>
-                                        <p:cTn id="22" dur="1" fill="hold">
-                                          <p:stCondLst>
-                                            <p:cond delay="0"/>
-                                          </p:stCondLst>
-                                        </p:cTn>
-                                        <p:tgtEl>
-                                          <p:spTgt spid="10"/>
-                                        </p:tgtEl>
-                                        <p:attrNameLst>
-                                          <p:attrName>style.visibility</p:attrName>
-                                        </p:attrNameLst>
-                                      </p:cBhvr>
-                                      <p:to>
-                                        <p:strVal val="visible"/>
-                                      </p:to>
-                                    </p:set>
-                                  </p:childTnLst>
-                                </p:cTn>
-                              </p:par>
-                              <p:par>
-                                <p:cTn id="23" presetID="1" presetClass="entr" presetSubtype="0" fill="hold" grpId="0" nodeType="withEffect">
-                                  <p:stCondLst>
-                                    <p:cond delay="0"/>
-                                  </p:stCondLst>
-                                  <p:childTnLst>
-                                    <p:set>
-                                      <p:cBhvr>
-                                        <p:cTn id="24" dur="1" fill="hold">
-                                          <p:stCondLst>
-                                            <p:cond delay="0"/>
-                                          </p:stCondLst>
-                                        </p:cTn>
-                                        <p:tgtEl>
-                                          <p:spTgt spid="11"/>
-                                        </p:tgtEl>
-                                        <p:attrNameLst>
-                                          <p:attrName>style.visibility</p:attrName>
-                                        </p:attrNameLst>
-                                      </p:cBhvr>
-                                      <p:to>
-                                        <p:strVal val="visible"/>
-                                      </p:to>
-                                    </p:set>
-                                  </p:childTnLst>
-                                </p:cTn>
-                              </p:par>
-                              <p:par>
-                                <p:cTn id="25" presetID="1" presetClass="entr" presetSubtype="0" fill="hold" grpId="0" nodeType="withEffect">
-                                  <p:stCondLst>
-                                    <p:cond delay="0"/>
-                                  </p:stCondLst>
-                                  <p:childTnLst>
-                                    <p:set>
-                                      <p:cBhvr>
-                                        <p:cTn id="26" dur="1" fill="hold">
-                                          <p:stCondLst>
-                                            <p:cond delay="0"/>
-                                          </p:stCondLst>
-                                        </p:cTn>
-                                        <p:tgtEl>
-                                          <p:spTgt spid="12"/>
-                                        </p:tgtEl>
-                                        <p:attrNameLst>
-                                          <p:attrName>style.visibility</p:attrName>
-                                        </p:attrNameLst>
-                                      </p:cBhvr>
-                                      <p:to>
-                                        <p:strVal val="visible"/>
-                                      </p:to>
-                                    </p:set>
-                                  </p:childTnLst>
-                                </p:cTn>
-                              </p:par>
-                            </p:childTnLst>
-                          </p:cTn>
-                        </p:par>
-                      </p:childTnLst>
-                    </p:cTn>
-                  </p:par>
-                  <p:par>
-                    <p:cTn id="34" fill="hold">
-                      <p:stCondLst>
-                        <p:cond delay="indefinite"/>
-                      </p:stCondLst>
-                      <p:childTnLst>
-                        <p:par>
-                          <p:cTn id="33" fill="hold">
-                            <p:stCondLst>
-                              <p:cond delay="0"/>
-                            </p:stCondLst>
-                            <p:childTnLst>
-                              <p:par>
-                                <p:cTn id="29" presetID="1" presetClass="entr" presetSubtype="0" fill="hold" grpId="0" nodeType="clickEffect">
-                                  <p:stCondLst>
-                                    <p:cond delay="0"/>
-                                  </p:stCondLst>
-                                  <p:childTnLst>
-                                    <p:set>
-                                      <p:cBhvr>
-                                        <p:cTn id="30" dur="1" fill="hold">
-                                          <p:stCondLst>
-                                            <p:cond delay="0"/>
-                                          </p:stCondLst>
-                                        </p:cTn>
-                                        <p:tgtEl>
-                                          <p:spTgt spid="13"/>
-                                        </p:tgtEl>
-                                        <p:attrNameLst>
-                                          <p:attrName>style.visibility</p:attrName>
-                                        </p:attrNameLst>
-                                      </p:cBhvr>
-                                      <p:to>
-                                        <p:strVal val="visible"/>
-                                      </p:to>
-                                    </p:set>
-                                  </p:childTnLst>
-                                </p:cTn>
-                              </p:par>
-                              <p:par>
-                                <p:cTn id="31" presetID="1" presetClass="entr" presetSubtype="0" fill="hold" grpId="0" nodeType="withEffect">
-                                  <p:stCondLst>
-                                    <p:cond delay="0"/>
-                                  </p:stCondLst>
-                                  <p:childTnLst>
-                                    <p:set>
-                                      <p:cBhvr>
-                                        <p:cTn id="32" dur="1" fill="hold">
-                                          <p:stCondLst>
-                                            <p:cond delay="0"/>
-                                          </p:stCondLst>
-                                        </p:cTn>
-                                        <p:tgtEl>
-                                          <p:spTgt spid="14"/>
-                                        </p:tgtEl>
-                                        <p:attrNameLst>
-                                          <p:attrName>style.visibility</p:attrName>
-                                        </p:attrNameLst>
-                                      </p:cBhvr>
-                                      <p:to>
-                                        <p:strVal val="visible"/>
-                                      </p:to>
-                                    </p:set>
-                                  </p:childTnLst>
-                                </p:cTn>
-                              </p:par>
-                            </p:childTnLst>
-                          </p:cTn>
-                        </p:par>
-                      </p:childTnLst>
-                    </p:cTn>
-                  </p:par>
-                  <p:par>
-                    <p:cTn id="40" fill="hold">
-                      <p:stCondLst>
-                        <p:cond delay="indefinite"/>
-                      </p:stCondLst>
-                      <p:childTnLst>
-                        <p:par>
-                          <p:cTn id="39" fill="hold">
-                            <p:stCondLst>
-                              <p:cond delay="0"/>
-                            </p:stCondLst>
-                            <p:childTnLst>
-                              <p:par>
-                                <p:cTn id="35" presetID="1" presetClass="entr" presetSubtype="0" fill="hold" grpId="0" nodeType="clickEffect">
-                                  <p:stCondLst>
-                                    <p:cond delay="0"/>
-                                  </p:stCondLst>
-                                  <p:childTnLst>
-                                    <p:set>
-                                      <p:cBhvr>
-                                        <p:cTn id="36" dur="1" fill="hold">
-                                          <p:stCondLst>
-                                            <p:cond delay="0"/>
-                                          </p:stCondLst>
-                                        </p:cTn>
-                                        <p:tgtEl>
-                                          <p:spTgt spid="15"/>
-                                        </p:tgtEl>
-                                        <p:attrNameLst>
-                                          <p:attrName>style.visibility</p:attrName>
-                                        </p:attrNameLst>
-                                      </p:cBhvr>
-                                      <p:to>
-                                        <p:strVal val="visible"/>
-                                      </p:to>
-                                    </p:set>
-                                  </p:childTnLst>
-                                </p:cTn>
-                              </p:par>
-                              <p:par>
-                                <p:cTn id="37" presetID="1" presetClass="entr" presetSubtype="0" fill="hold" grpId="0" nodeType="withEffect">
-                                  <p:stCondLst>
-                                    <p:cond delay="0"/>
-                                  </p:stCondLst>
-                                  <p:childTnLst>
-                                    <p:set>
-                                      <p:cBhvr>
-                                        <p:cTn id="38" dur="1" fill="hold">
-                                          <p:stCondLst>
-                                            <p:cond delay="0"/>
-                                          </p:stCondLst>
-                                        </p:cTn>
-                                        <p:tgtEl>
-                                          <p:spTgt spid="16"/>
-                                        </p:tgtEl>
-                                        <p:attrNameLst>
-                                          <p:attrName>style.visibility</p:attrName>
-                                        </p:attrNameLst>
-                                      </p:cBhvr>
-                                      <p:to>
-                                        <p:strVal val="visible"/>
-                                      </p:to>
-                                    </p:set>
-                                  </p:childTnLst>
-                                </p:cTn>
-                              </p:par>
-                            </p:childTnLst>
-                          </p:cTn>
-                        </p:par>
-                      </p:childTnLst>
-                    </p:cTn>
-                  </p:par>
-                  <p:par>
-                    <p:cTn id="50" fill="hold">
-                      <p:stCondLst>
-                        <p:cond delay="indefinite"/>
-                      </p:stCondLst>
-                      <p:childTnLst>
-                        <p:par>
-                          <p:cTn id="49" fill="hold">
-                            <p:stCondLst>
-                              <p:cond delay="0"/>
-                            </p:stCondLst>
-                            <p:childTnLst>
-                              <p:par>
-                                <p:cTn id="41" presetID="1" presetClass="entr" presetSubtype="0" fill="hold" grpId="0" nodeType="clickEffect">
-                                  <p:stCondLst>
-                                    <p:cond delay="0"/>
-                                  </p:stCondLst>
-                                  <p:childTnLst>
-                                    <p:set>
-                                      <p:cBhvr>
-                                        <p:cTn id="42" dur="1" fill="hold">
-                                          <p:stCondLst>
-                                            <p:cond delay="0"/>
-                                          </p:stCondLst>
-                                        </p:cTn>
-                                        <p:tgtEl>
-                                          <p:spTgt spid="17"/>
-                                        </p:tgtEl>
-                                        <p:attrNameLst>
-                                          <p:attrName>style.visibility</p:attrName>
-                                        </p:attrNameLst>
-                                      </p:cBhvr>
-                                      <p:to>
-                                        <p:strVal val="visible"/>
-                                      </p:to>
-                                    </p:set>
-                                  </p:childTnLst>
-                                </p:cTn>
-                              </p:par>
-                              <p:par>
-                                <p:cTn id="43" presetID="1" presetClass="entr" presetSubtype="0" fill="hold" grpId="0" nodeType="withEffect">
-                                  <p:stCondLst>
-                                    <p:cond delay="0"/>
-                                  </p:stCondLst>
-                                  <p:childTnLst>
-                                    <p:set>
-                                      <p:cBhvr>
-                                        <p:cTn id="44" dur="1" fill="hold">
-                                          <p:stCondLst>
-                                            <p:cond delay="0"/>
-                                          </p:stCondLst>
-                                        </p:cTn>
-                                        <p:tgtEl>
-                                          <p:spTgt spid="18"/>
-                                        </p:tgtEl>
-                                        <p:attrNameLst>
-                                          <p:attrName>style.visibility</p:attrName>
-                                        </p:attrNameLst>
-                                      </p:cBhvr>
-                                      <p:to>
-                                        <p:strVal val="visible"/>
-                                      </p:to>
-                                    </p:set>
-                                  </p:childTnLst>
-                                </p:cTn>
-                              </p:par>
-                              <p:par>
-                                <p:cTn id="45" presetID="1" presetClass="entr" presetSubtype="0" fill="hold" grpId="0" nodeType="withEffect">
-                                  <p:stCondLst>
-                                    <p:cond delay="0"/>
-                                  </p:stCondLst>
-                                  <p:childTnLst>
-                                    <p:set>
-                                      <p:cBhvr>
-                                        <p:cTn id="46" dur="1" fill="hold">
-                                          <p:stCondLst>
-                                            <p:cond delay="0"/>
-                                          </p:stCondLst>
-                                        </p:cTn>
-                                        <p:tgtEl>
-                                          <p:spTgt spid="19"/>
-                                        </p:tgtEl>
-                                        <p:attrNameLst>
-                                          <p:attrName>style.visibility</p:attrName>
-                                        </p:attrNameLst>
-                                      </p:cBhvr>
-                                      <p:to>
-                                        <p:strVal val="visible"/>
-                                      </p:to>
-                                    </p:set>
-                                  </p:childTnLst>
-                                </p:cTn>
-                              </p:par>
-                              <p:par>
-                                <p:cTn id="47" presetID="1" presetClass="entr" presetSubtype="0" fill="hold" grpId="0" nodeType="withEffect">
-                                  <p:stCondLst>
-                                    <p:cond delay="0"/>
-                                  </p:stCondLst>
-                                  <p:childTnLst>
-                                    <p:set>
-                                      <p:cBhvr>
-                                        <p:cTn id="48" dur="1" fill="hold">
-                                          <p:stCondLst>
-                                            <p:cond delay="0"/>
-                                          </p:stCondLst>
-                                        </p:cTn>
-                                        <p:tgtEl>
-                                          <p:spTgt spid="20"/>
-                                        </p:tgtEl>
-                                        <p:attrNameLst>
-                                          <p:attrName>style.visibility</p:attrName>
-                                        </p:attrNameLst>
-                                      </p:cBhvr>
-                                      <p:to>
-                                        <p:strVal val="visible"/>
-                                      </p:to>
-                                    </p:set>
-                                  </p:childTnLst>
-                                </p:cTn>
-                              </p:par>
-                            </p:childTnLst>
-                          </p:cTn>
-                        </p:par>
-                      </p:childTnLst>
-                    </p:cTn>
-                  </p:par>
-                  <p:par>
-                    <p:cTn id="54" fill="hold">
-                      <p:stCondLst>
-                        <p:cond delay="indefinite"/>
-                      </p:stCondLst>
-                      <p:childTnLst>
-                        <p:par>
-                          <p:cTn id="53" fill="hold">
-                            <p:stCondLst>
-                              <p:cond delay="0"/>
-                            </p:stCondLst>
-                            <p:childTnLst>
-                              <p:par>
-                                <p:cTn id="51" presetID="1" presetClass="entr" presetSubtype="0" fill="hold" grpId="0" nodeType="clickEffect">
-                                  <p:stCondLst>
-                                    <p:cond delay="0"/>
-                                  </p:stCondLst>
-                                  <p:childTnLst>
-                                    <p:set>
-                                      <p:cBhvr>
-                                        <p:cTn id="52" dur="1" fill="hold">
-                                          <p:stCondLst>
-                                            <p:cond delay="0"/>
-                                          </p:stCondLst>
-                                        </p:cTn>
-                                        <p:tgtEl>
-                                          <p:spTgt spid="21"/>
-                                        </p:tgtEl>
-                                        <p:attrNameLst>
-                                          <p:attrName>style.visibility</p:attrName>
-                                        </p:attrNameLst>
-                                      </p:cBhvr>
-                                      <p:to>
-                                        <p:strVal val="visible"/>
-                                      </p:to>
-                                    </p:set>
-                                  </p:childTnLst>
-                                </p:cTn>
-                              </p:par>
-                            </p:childTnLst>
-                          </p:cTn>
-                        </p:par>
-                      </p:childTnLst>
-                    </p:cTn>
-                  </p:par>
-                  <p:par>
-                    <p:cTn id="58" fill="hold">
-                      <p:stCondLst>
-                        <p:cond delay="indefinite"/>
-                      </p:stCondLst>
-                      <p:childTnLst>
-                        <p:par>
-                          <p:cTn id="57" fill="hold">
-                            <p:stCondLst>
-                              <p:cond delay="0"/>
-                            </p:stCondLst>
-                            <p:childTnLst>
-                              <p:par>
-                                <p:cTn id="55" presetID="1" presetClass="entr" presetSubtype="0" fill="hold" grpId="0" nodeType="clickEffect">
-                                  <p:stCondLst>
-                                    <p:cond delay="0"/>
-                                  </p:stCondLst>
-                                  <p:childTnLst>
-                                    <p:set>
-                                      <p:cBhvr>
-                                        <p:cTn id="56" dur="1" fill="hold">
-                                          <p:stCondLst>
-                                            <p:cond delay="0"/>
-                                          </p:stCondLst>
-                                        </p:cTn>
-                                        <p:tgtEl>
-                                          <p:spTgt spid="22"/>
-                                        </p:tgtEl>
-                                        <p:attrNameLst>
-                                          <p:attrName>style.visibility</p:attrName>
-                                        </p:attrNameLst>
-                                      </p:cBhvr>
-                                      <p:to>
-                                        <p:strVal val="visible"/>
-                                      </p:to>
-                                    </p:set>
-                                  </p:childTnLst>
-                                </p:cTn>
-                              </p:par>
-                            </p:childTnLst>
-                          </p:cTn>
-                        </p:par>
-                      </p:childTnLst>
-                    </p:cTn>
-                  </p:par>
-                  <p:par>
-                    <p:cTn id="62" fill="hold">
-                      <p:stCondLst>
-                        <p:cond delay="indefinite"/>
-                      </p:stCondLst>
-                      <p:childTnLst>
-                        <p:par>
-                          <p:cTn id="61" fill="hold">
-                            <p:stCondLst>
-                              <p:cond delay="0"/>
-                            </p:stCondLst>
-                            <p:childTnLst>
-                              <p:par>
-                                <p:cTn id="59" presetID="1" presetClass="entr" presetSubtype="0" fill="hold" grpId="0" nodeType="clickEffect">
-                                  <p:stCondLst>
-                                    <p:cond delay="0"/>
-                                  </p:stCondLst>
-                                  <p:childTnLst>
-                                    <p:set>
-                                      <p:cBhvr>
-                                        <p:cTn id="60" dur="1" fill="hold">
-                                          <p:stCondLst>
-                                            <p:cond delay="0"/>
-                                          </p:stCondLst>
-                                        </p:cTn>
-                                        <p:tgtEl>
-                                          <p:spTgt spid="23"/>
-                                        </p:tgtEl>
-                                        <p:attrNameLst>
-                                          <p:attrName>style.visibility</p:attrName>
-                                        </p:attrNameLst>
-                                      </p:cBhvr>
-                                      <p:to>
-                                        <p:strVal val="visible"/>
-                                      </p:to>
-                                    </p:set>
-                                  </p:childTnLst>
-                                </p:cTn>
-                              </p:par>
-                            </p:childTnLst>
-                          </p:cTn>
-                        </p:par>
-                      </p:childTnLst>
-                    </p:cTn>
-                  </p:par>
-                </p:childTnLst>
-              </p:cTn>
-              <p:prevCondLst>
-                <p:cond evt="onPrev" delay="0">
-                  <p:tgtEl>
-                    <p:sldTgt/>
-                  </p:tgtEl>
-                </p:cond>
-              </p:prevCondLst>
-              <p:nextCondLst>
-                <p:cond evt="onNext" delay="0">
-                  <p:tgtEl>
-                    <p:sldTgt/>
-                  </p:tgtEl>
-                </p:cond>
-              </p:nextCondLst>
-            </p:seq>
-          </p:childTnLst>
-        </p:cTn>
-      </p:par>
-    </p:tnLst>
-    <p:bldLst>
-      <p:bldP spid="4" grpId="0"/>
-      <p:bldP spid="5" grpId="0"/>
-      <p:bldP spid="6" grpId="0"/>
-      <p:bldP spid="7" grpId="0"/>
-      <p:bldP spid="8" grpId="0"/>
-      <p:bldP spid="9" grpId="0"/>
-      <p:bldP spid="10" grpId="0"/>
-      <p:bldP spid="11" grpId="0"/>
-      <p:bldP spid="12" grpId="0"/>
-      <p:bldP spid="13" grpId="0"/>
-      <p:bldP spid="14" grpId="0"/>
-      <p:bldP spid="15" grpId="0"/>
-      <p:bldP spid="16" grpId="0"/>
-      <p:bldP spid="17" grpId="0"/>
-      <p:bldP spid="18" grpId="0"/>
-      <p:bldP spid="19" grpId="0"/>
-      <p:bldP spid="20" grpId="0"/>
-      <p:bldP spid="21" grpId="0"/>
-      <p:bldP spid="22" grpId="0"/>
-      <p:bldP spid="23" grpId="0"/>
     </p:bldLst>
   </p:timing>
 </p:sld>
